--- a/lectures/Lecture 7.1 - React State and Effects.pptx
+++ b/lectures/Lecture 7.1 - React State and Effects.pptx
@@ -1569,7 +1569,7 @@
             </a:pPr>
             <a:r>
               <a:rPr lang="en-US" dirty="0"/>
-              <a:t>Three buttons, three handlers, one piece of state. Each handler is an inline arrow function that computes the new value from the current one. Point out that `count - 1` and `count + 1` are reading whatever count is RIGHT NOW, at click time...which is how React stays consistent with the value rendered in the paragraph above.</a:t>
+              <a:t>Three buttons and three handlers all hanging off one piece of state, and each handler is an inline arrow function computing the new value off the current one. Point out that `count - 1` and `count + 1` are reading whatever count is RIGHT NOW, at click time...which is how React stays consistent with the value rendered in the paragraph above.</a:t>
             </a:r>
             <a:endParaRPr dirty="0"/>
           </a:p>
@@ -1727,15 +1727,15 @@
             </a:pPr>
             <a:r>
               <a:rPr lang="en-US" dirty="0"/>
-              <a:t>The controlled-input pattern. Students will use this for basically every form they ever build in React, so it's really worth sitting on. Two rules: value is bound to state, </a:t>
+              <a:t>The controlled-input pattern, and they'll use it for basically every form they ever build in React, so it's really worth sitting on. The rules are that value is bound to state and onChange updates state.</a:t>
             </a:r>
             <a:r>
               <a:rPr lang="en-US" dirty="0" err="1"/>
-              <a:t>onChange</a:t>
+              <a:t/>
             </a:r>
             <a:r>
               <a:rPr lang="en-US" dirty="0"/>
-              <a:t> updates state. The slight weirdness is that state IS the source of truth now - if you forget to update state on change, typing in the input does absolutely nothing. That confuses students the first time they see it.</a:t>
+              <a:t> The slight weirdness is that state IS the source of truth now - if you forget to update state on change, typing in the input does absolutely nothing. That confuses students the first time they see it.</a:t>
             </a:r>
             <a:endParaRPr dirty="0"/>
           </a:p>
@@ -4153,7 +4153,7 @@
             </a:pPr>
             <a:r>
               <a:rPr lang="en-US" dirty="0"/>
-              <a:t>Every data-fetching component in the universe has this exact shape. Once students recognize the pattern they can apply it to any fetch. Worth mentioning that libraries like React Query exist specifically to automate this pattern away, but writing it by hand first really builds the intuition for what those libraries are actually doing for you under the hood.</a:t>
+              <a:t>Just about every data-fetching component out there has this exact shape, and once they recognize it they can point it at any fetch they like. Worth mentioning that libraries like React Query exist specifically to automate this pattern away, but writing it by hand first really builds the intuition for what those libraries are actually doing for you under the hood.</a:t>
             </a:r>
             <a:endParaRPr dirty="0"/>
           </a:p>
@@ -7186,7 +7186,7 @@
             </a:pPr>
             <a:r>
               <a:rPr lang="en-US" dirty="0"/>
-              <a:t>The cure: capture the interval id, return a function that clears it. Two added characters and a one-line return. Make the diff visible - the difference between a leak and a clean component is literally one line. Mention briefly that this same shape (setup at the top of the effect, teardown in the return) is how you'd wire up a WebSocket (`new WebSocket` at the top, `.close()` in the return), or a window resize listener (`</a:t>
+              <a:t>The cure is to capture the interval id and return a function that clears it, which is two added characters and a one-line return. Make the diff visible, because a leak and a clean component are separated by literally one line here. Mention briefly that this same shape (setup at the top of the effect, teardown in the return) is how you'd wire up a WebSocket (`new WebSocket` at the top, `.close()` in the return), or a window resize listener (`</a:t>
             </a:r>
             <a:r>
               <a:rPr lang="en-US" dirty="0" err="1"/>
@@ -7368,23 +7368,23 @@
             </a:r>
             <a:r>
               <a:rPr lang="en-US" dirty="0"/>
-              <a:t> return value is the single most confusing part for students who are new to hooks. Hammer on three things: you always </a:t>
+              <a:t> return value is the single most confusing part for students who are new to hooks. Hammer on it: you always destructure it, you always call it at the top of the component, and the names are technically up to you but the convention everybody reads is [thing, setThing].</a:t>
             </a:r>
             <a:r>
               <a:rPr lang="en-US" dirty="0" err="1"/>
-              <a:t>destructure</a:t>
+              <a:t/>
             </a:r>
             <a:r>
               <a:rPr lang="en-US" dirty="0"/>
-              <a:t> it, you always call it at the top of the component, and the names are up to you but the convention everyone reads is [thing, </a:t>
+              <a:t/>
             </a:r>
             <a:r>
               <a:rPr lang="en-US" dirty="0" err="1"/>
-              <a:t>setThing</a:t>
+              <a:t/>
             </a:r>
             <a:r>
               <a:rPr lang="en-US" dirty="0"/>
-              <a:t>]. If their coding agent writes [</a:t>
+              <a:t> If their coding agent writes [</a:t>
             </a:r>
             <a:r>
               <a:rPr lang="en-US" dirty="0" err="1"/>
@@ -7654,7 +7654,7 @@
             </a:pPr>
             <a:r>
               <a:rPr lang="en-US" dirty="0"/>
-              <a:t>The cure: capture the interval id, return a function that clears it. Two added characters and a one-line return. Make the diff visible - the difference between a leak and a clean component is literally one line. Mention briefly that this same shape (setup at the top of the effect, teardown in the return) is how you'd wire up a WebSocket (`new WebSocket` at the top, `.close()` in the return), or a window resize listener (`</a:t>
+              <a:t>The cure is to capture the interval id and return a function that clears it, which is two added characters and a one-line return. Make the diff visible, because a leak and a clean component are separated by literally one line here. Mention briefly that this same shape (setup at the top of the effect, teardown in the return) is how you'd wire up a WebSocket (`new WebSocket` at the top, `.close()` in the return), or a window resize listener (`</a:t>
             </a:r>
             <a:r>
               <a:rPr lang="en-US" dirty="0" err="1"/>

--- a/lectures/Lecture 7.1 - React State and Effects.pptx
+++ b/lectures/Lecture 7.1 - React State and Effects.pptx
@@ -1020,60 +1020,9 @@
           </a:bodyPr>
           <a:lstStyle/>
           <a:p>
-            <a:pPr marL="0" lvl="0" indent="0" algn="l" rtl="0">
-              <a:spcBef>
-                <a:spcPts val="0"/>
-              </a:spcBef>
-              <a:spcAft>
-                <a:spcPts val="0"/>
-              </a:spcAft>
-              <a:buNone/>
-            </a:pPr>
-            <a:r>
-              <a:rPr lang="en-US" dirty="0"/>
-              <a:t>This slide is really the under-explained mechanic of React, and once students get it the rules of hooks stop feeling arbitrary. Walk through it slowly: before React calls Counter(), it sets a module-level 'currently rendering fiber' pointer. </a:t>
-            </a:r>
-            <a:r>
-              <a:rPr lang="en-US" dirty="0" err="1"/>
-              <a:t>useState</a:t>
-            </a:r>
-            <a:r>
-              <a:rPr lang="en-US" dirty="0"/>
-              <a:t> reads that pointer, walks the linked list of hook slots on that fiber, grabs (or creates) the next slot by call order, and returns [</a:t>
-            </a:r>
-            <a:r>
-              <a:rPr lang="en-US" dirty="0" err="1"/>
-              <a:t>slot.value</a:t>
-            </a:r>
-            <a:r>
-              <a:rPr lang="en-US" dirty="0"/>
-              <a:t>, </a:t>
-            </a:r>
-            <a:r>
-              <a:rPr lang="en-US" dirty="0" err="1"/>
-              <a:t>slot.setter</a:t>
-            </a:r>
-            <a:r>
-              <a:rPr lang="en-US" dirty="0"/>
-              <a:t>]. The setter was created when the slot was, capturing (fiber, </a:t>
-            </a:r>
-            <a:r>
-              <a:rPr lang="en-US" dirty="0" err="1"/>
-              <a:t>slotIndex</a:t>
-            </a:r>
-            <a:r>
-              <a:rPr lang="en-US" dirty="0"/>
-              <a:t>) in its closure...so calling it later already has all the addressing info baked in. Pay this off later in 7.x or 8.x when stale closures or rules-of-hooks lint errors come up. The rules-of-hooks bit at the bottom matters - students who skip the rule and conditionally call </a:t>
-            </a:r>
-            <a:r>
-              <a:rPr lang="en-US" dirty="0" err="1"/>
-              <a:t>useState</a:t>
-            </a:r>
-            <a:r>
-              <a:rPr lang="en-US" dirty="0"/>
-              <a:t> get totally cryptic bugs that are basically uninvestigable without this mental model.</a:t>
-            </a:r>
-            <a:endParaRPr dirty="0"/>
+            <a:r>
+              <a:t>Walk through: React sets a 'currently rendering fiber' pointer before calling Counter().</a:t>
+            </a:r>
           </a:p>
         </p:txBody>
       </p:sp>
@@ -1217,46 +1166,7 @@
             <a:noAutofit/>
           </a:bodyPr>
           <a:lstStyle/>
-          <a:p>
-            <a:pPr marL="0" lvl="0" indent="0" algn="l" rtl="0">
-              <a:spcBef>
-                <a:spcPts val="0"/>
-              </a:spcBef>
-              <a:spcAft>
-                <a:spcPts val="0"/>
-              </a:spcAft>
-              <a:buNone/>
-            </a:pPr>
-            <a:r>
-              <a:rPr lang="en-US" dirty="0"/>
-              <a:t>Each </a:t>
-            </a:r>
-            <a:r>
-              <a:rPr lang="en-US" dirty="0" err="1"/>
-              <a:t>useState</a:t>
-            </a:r>
-            <a:r>
-              <a:rPr lang="en-US" dirty="0"/>
-              <a:t> is independent of the others. You can have as many as you need. The one rule is that they have to be called in the same ORDER on every render, which really just means no </a:t>
-            </a:r>
-            <a:r>
-              <a:rPr lang="en-US" dirty="0" err="1"/>
-              <a:t>useState</a:t>
-            </a:r>
-            <a:r>
-              <a:rPr lang="en-US" dirty="0"/>
-              <a:t> inside if statements or loops. React tracks them by call order, not by name...which is </a:t>
-            </a:r>
-            <a:r>
-              <a:rPr lang="en-US" dirty="0" err="1"/>
-              <a:t>kinda</a:t>
-            </a:r>
-            <a:r>
-              <a:rPr lang="en-US" dirty="0"/>
-              <a:t> wild the first time you learn it.</a:t>
-            </a:r>
-            <a:endParaRPr dirty="0"/>
-          </a:p>
+          <a:p/>
         </p:txBody>
       </p:sp>
       <p:sp>
@@ -1400,20 +1310,9 @@
           </a:bodyPr>
           <a:lstStyle/>
           <a:p>
-            <a:pPr marL="0" lvl="0" indent="0" algn="l" rtl="0">
-              <a:spcBef>
-                <a:spcPts val="0"/>
-              </a:spcBef>
-              <a:spcAft>
-                <a:spcPts val="0"/>
-              </a:spcAft>
-              <a:buNone/>
-            </a:pPr>
-            <a:r>
-              <a:rPr lang="en-US" dirty="0"/>
-              <a:t>Students should pretty much memorize this loop - it's the foundation for every React debugging intuition they'll ever need. When something doesn't update, trace through: which step is broken? Usually it's step 2 (forgot to call the setter in the first place) or step 7 (React saw the same reference and skipped the update). If their coding agent produces 'my state isn't updating' bugs, this is the slide to push them back to.</a:t>
-            </a:r>
-            <a:endParaRPr dirty="0"/>
+            <a:r>
+              <a:t>When something doesn't update, trace the loop: usually step 2 or step 7.</a:t>
+            </a:r>
           </a:p>
         </p:txBody>
       </p:sp>
@@ -1557,22 +1456,7 @@
             <a:noAutofit/>
           </a:bodyPr>
           <a:lstStyle/>
-          <a:p>
-            <a:pPr marL="0" lvl="0" indent="0" algn="l" rtl="0">
-              <a:spcBef>
-                <a:spcPts val="0"/>
-              </a:spcBef>
-              <a:spcAft>
-                <a:spcPts val="0"/>
-              </a:spcAft>
-              <a:buNone/>
-            </a:pPr>
-            <a:r>
-              <a:rPr lang="en-US" dirty="0"/>
-              <a:t>Three buttons and three handlers all hanging off one piece of state, and each handler is an inline arrow function computing the new value off the current one. Point out that `count - 1` and `count + 1` are reading whatever count is RIGHT NOW, at click time...which is how React stays consistent with the value rendered in the paragraph above.</a:t>
-            </a:r>
-            <a:endParaRPr dirty="0"/>
-          </a:p>
+          <a:p/>
         </p:txBody>
       </p:sp>
       <p:sp>
@@ -1716,100 +1600,9 @@
           </a:bodyPr>
           <a:lstStyle/>
           <a:p>
-            <a:pPr marL="0" lvl="0" indent="0" algn="l" rtl="0">
-              <a:spcBef>
-                <a:spcPts val="0"/>
-              </a:spcBef>
-              <a:spcAft>
-                <a:spcPts val="0"/>
-              </a:spcAft>
-              <a:buNone/>
-            </a:pPr>
-            <a:r>
-              <a:rPr lang="en-US" dirty="0"/>
-              <a:t>The controlled-input pattern, and they'll use it for basically every form they ever build in React, so it's really worth sitting on. The rules are that value is bound to state and onChange updates state.</a:t>
-            </a:r>
-            <a:r>
-              <a:rPr lang="en-US" dirty="0" err="1"/>
-              <a:t/>
-            </a:r>
-            <a:r>
-              <a:rPr lang="en-US" dirty="0"/>
-              <a:t> The slight weirdness is that state IS the source of truth now - if you forget to update state on change, typing in the input does absolutely nothing. That confuses students the first time they see it.</a:t>
-            </a:r>
-            <a:endParaRPr dirty="0"/>
-          </a:p>
-          <a:p>
-            <a:pPr marL="0" lvl="0" indent="0" algn="l" rtl="0">
-              <a:spcBef>
-                <a:spcPts val="0"/>
-              </a:spcBef>
-              <a:spcAft>
-                <a:spcPts val="0"/>
-              </a:spcAft>
-              <a:buNone/>
-            </a:pPr>
-            <a:endParaRPr dirty="0"/>
-          </a:p>
-          <a:p>
-            <a:pPr marL="0" lvl="0" indent="0" algn="l" rtl="0">
-              <a:spcBef>
-                <a:spcPts val="0"/>
-              </a:spcBef>
-              <a:spcAft>
-                <a:spcPts val="0"/>
-              </a:spcAft>
-              <a:buNone/>
-            </a:pPr>
-            <a:r>
-              <a:rPr lang="en-US" dirty="0"/>
-              <a:t>const [name, </a:t>
-            </a:r>
-            <a:r>
-              <a:rPr lang="en-US" dirty="0" err="1"/>
-              <a:t>setName</a:t>
-            </a:r>
-            <a:r>
-              <a:rPr lang="en-US" dirty="0"/>
-              <a:t>] = </a:t>
-            </a:r>
-            <a:r>
-              <a:rPr lang="en-US" dirty="0" err="1"/>
-              <a:t>useState</a:t>
-            </a:r>
-            <a:r>
-              <a:rPr lang="en-US" dirty="0"/>
-              <a:t>("");</a:t>
-            </a:r>
-            <a:endParaRPr dirty="0"/>
-          </a:p>
-          <a:p>
-            <a:pPr marL="0" lvl="0" indent="0" algn="l" rtl="0">
-              <a:spcBef>
-                <a:spcPts val="0"/>
-              </a:spcBef>
-              <a:spcAft>
-                <a:spcPts val="0"/>
-              </a:spcAft>
-              <a:buNone/>
-            </a:pPr>
-            <a:r>
-              <a:rPr lang="en-US" dirty="0" err="1"/>
-              <a:t>setName</a:t>
-            </a:r>
-            <a:r>
-              <a:rPr lang="en-US" dirty="0"/>
-              <a:t>(</a:t>
-            </a:r>
-            <a:r>
-              <a:rPr lang="en-US" dirty="0" err="1"/>
-              <a:t>e.target.value</a:t>
-            </a:r>
-            <a:r>
-              <a:rPr lang="en-US" dirty="0"/>
-              <a:t>)</a:t>
-            </a:r>
-            <a:endParaRPr dirty="0"/>
+            <a:r>
+              <a:t>Answers: setName, useState(""), setName(e.target.value). Forget onChange and typing does nothing.</a:t>
+            </a:r>
           </a:p>
         </p:txBody>
       </p:sp>
@@ -1953,30 +1746,7 @@
             <a:noAutofit/>
           </a:bodyPr>
           <a:lstStyle/>
-          <a:p>
-            <a:pPr marL="0" lvl="0" indent="0" algn="l" rtl="0">
-              <a:spcBef>
-                <a:spcPts val="0"/>
-              </a:spcBef>
-              <a:spcAft>
-                <a:spcPts val="0"/>
-              </a:spcAft>
-              <a:buNone/>
-            </a:pPr>
-            <a:r>
-              <a:rPr lang="en-US" dirty="0"/>
-              <a:t>The second hook. Mental model really matters here - side effects do NOT belong in the render body, and </a:t>
-            </a:r>
-            <a:r>
-              <a:rPr lang="en-US" dirty="0" err="1"/>
-              <a:t>useEffect</a:t>
-            </a:r>
-            <a:r>
-              <a:rPr lang="en-US" dirty="0"/>
-              <a:t> is the controlled way to do them.</a:t>
-            </a:r>
-            <a:endParaRPr dirty="0"/>
-          </a:p>
+          <a:p/>
         </p:txBody>
       </p:sp>
       <p:sp>
@@ -2120,144 +1890,9 @@
           </a:bodyPr>
           <a:lstStyle/>
           <a:p>
-            <a:pPr marL="0" lvl="0" indent="0" algn="l" rtl="0">
-              <a:spcBef>
-                <a:spcPts val="0"/>
-              </a:spcBef>
-              <a:spcAft>
-                <a:spcPts val="0"/>
-              </a:spcAft>
-              <a:buNone/>
-            </a:pPr>
-            <a:r>
-              <a:rPr lang="en-US" dirty="0"/>
-              <a:t>// Open the network tab. The page hammers /</a:t>
-            </a:r>
-            <a:r>
-              <a:rPr lang="en-US" dirty="0" err="1"/>
-              <a:t>api</a:t>
-            </a:r>
-            <a:r>
-              <a:rPr lang="en-US" dirty="0"/>
-              <a:t>/messages forever.</a:t>
-            </a:r>
-            <a:endParaRPr dirty="0"/>
-          </a:p>
-          <a:p>
-            <a:pPr marL="0" lvl="0" indent="0" algn="l" rtl="0">
-              <a:spcBef>
-                <a:spcPts val="0"/>
-              </a:spcBef>
-              <a:spcAft>
-                <a:spcPts val="0"/>
-              </a:spcAft>
-              <a:buNone/>
-            </a:pPr>
-            <a:r>
-              <a:rPr lang="en-US" dirty="0"/>
-              <a:t>//</a:t>
-            </a:r>
-            <a:endParaRPr dirty="0"/>
-          </a:p>
-          <a:p>
-            <a:pPr marL="0" lvl="0" indent="0" algn="l" rtl="0">
-              <a:spcBef>
-                <a:spcPts val="0"/>
-              </a:spcBef>
-              <a:spcAft>
-                <a:spcPts val="0"/>
-              </a:spcAft>
-              <a:buNone/>
-            </a:pPr>
-            <a:r>
-              <a:rPr lang="en-US" dirty="0"/>
-              <a:t>// Why? The function body runs on EVERY render. The fetch fires,</a:t>
-            </a:r>
-            <a:endParaRPr dirty="0"/>
-          </a:p>
-          <a:p>
-            <a:pPr marL="0" lvl="0" indent="0" algn="l" rtl="0">
-              <a:spcBef>
-                <a:spcPts val="0"/>
-              </a:spcBef>
-              <a:spcAft>
-                <a:spcPts val="0"/>
-              </a:spcAft>
-              <a:buNone/>
-            </a:pPr>
-            <a:r>
-              <a:rPr lang="en-US" dirty="0"/>
-              <a:t>// completes, calls </a:t>
-            </a:r>
-            <a:r>
-              <a:rPr lang="en-US" dirty="0" err="1"/>
-              <a:t>setMessages</a:t>
-            </a:r>
-            <a:r>
-              <a:rPr lang="en-US" dirty="0"/>
-              <a:t>, which triggers a re-render. The</a:t>
-            </a:r>
-            <a:endParaRPr dirty="0"/>
-          </a:p>
-          <a:p>
-            <a:pPr marL="0" lvl="0" indent="0" algn="l" rtl="0">
-              <a:spcBef>
-                <a:spcPts val="0"/>
-              </a:spcBef>
-              <a:spcAft>
-                <a:spcPts val="0"/>
-              </a:spcAft>
-              <a:buNone/>
-            </a:pPr>
-            <a:r>
-              <a:rPr lang="en-US" dirty="0"/>
-              <a:t>// re-render runs the body again - fetch again. Infinite loop.</a:t>
-            </a:r>
-            <a:endParaRPr dirty="0"/>
-          </a:p>
-          <a:p>
-            <a:pPr marL="0" lvl="0" indent="0" algn="l" rtl="0">
-              <a:spcBef>
-                <a:spcPts val="0"/>
-              </a:spcBef>
-              <a:spcAft>
-                <a:spcPts val="0"/>
-              </a:spcAft>
-              <a:buNone/>
-            </a:pPr>
-            <a:endParaRPr dirty="0"/>
-          </a:p>
-          <a:p>
-            <a:pPr marL="0" lvl="0" indent="0" algn="l" rtl="0">
-              <a:spcBef>
-                <a:spcPts val="0"/>
-              </a:spcBef>
-              <a:spcAft>
-                <a:spcPts val="0"/>
-              </a:spcAft>
-              <a:buNone/>
-            </a:pPr>
-            <a:r>
-              <a:rPr lang="en-US" dirty="0"/>
-              <a:t>Anything that TOUCHES THE OUTSIDE WORLD (fetch, subscribe, timer, </a:t>
-            </a:r>
-            <a:r>
-              <a:rPr lang="en-US" dirty="0" err="1"/>
-              <a:t>document.title</a:t>
-            </a:r>
-            <a:r>
-              <a:rPr lang="en-US" dirty="0"/>
-              <a:t>) doesn't belong there, because the body re-runs on every render. Some students will say 'just add a flag' - show why that doesn't work either, the flag resets every render, same problem as count in the broken counter. The answer is 'we need a tool that runs AFTER render and only when we say so' - which is exactly </a:t>
-            </a:r>
-            <a:r>
-              <a:rPr lang="en-US" dirty="0" err="1"/>
-              <a:t>useEffect</a:t>
-            </a:r>
-            <a:r>
-              <a:rPr lang="en-US" dirty="0"/>
-              <a:t>, on the next two slides.</a:t>
-            </a:r>
-            <a:endParaRPr dirty="0"/>
+            <a:r>
+              <a:t>Show network tab: infinite fetch loop. 'Add a flag' fails too, flag resets each render.</a:t>
+            </a:r>
           </a:p>
         </p:txBody>
       </p:sp>
@@ -2401,38 +2036,7 @@
             <a:noAutofit/>
           </a:bodyPr>
           <a:lstStyle/>
-          <a:p>
-            <a:pPr marL="0" lvl="0" indent="0" algn="l" rtl="0">
-              <a:spcBef>
-                <a:spcPts val="0"/>
-              </a:spcBef>
-              <a:spcAft>
-                <a:spcPts val="0"/>
-              </a:spcAft>
-              <a:buNone/>
-            </a:pPr>
-            <a:r>
-              <a:rPr lang="en-US" dirty="0"/>
-              <a:t>The motivation actually matters here. Students need to really understand that side effects would fire uncontrollably if you just put them in the render body - otherwise </a:t>
-            </a:r>
-            <a:r>
-              <a:rPr lang="en-US" dirty="0" err="1"/>
-              <a:t>useEffect</a:t>
-            </a:r>
-            <a:r>
-              <a:rPr lang="en-US" dirty="0"/>
-              <a:t> looks like extra ceremony for no reason. </a:t>
-            </a:r>
-            <a:r>
-              <a:rPr lang="en-US" dirty="0" err="1"/>
-              <a:t>useEffect</a:t>
-            </a:r>
-            <a:r>
-              <a:rPr lang="en-US" dirty="0"/>
-              <a:t> is the controlled way to do anything that touches the outside world, and the reason it exists at all is that the render body is the wrong place.</a:t>
-            </a:r>
-            <a:endParaRPr dirty="0"/>
-          </a:p>
+          <a:p/>
         </p:txBody>
       </p:sp>
       <p:sp>
@@ -2575,38 +2179,7 @@
             <a:noAutofit/>
           </a:bodyPr>
           <a:lstStyle/>
-          <a:p>
-            <a:pPr marL="0" lvl="0" indent="0" algn="l" rtl="0">
-              <a:spcBef>
-                <a:spcPts val="0"/>
-              </a:spcBef>
-              <a:spcAft>
-                <a:spcPts val="0"/>
-              </a:spcAft>
-              <a:buNone/>
-            </a:pPr>
-            <a:r>
-              <a:rPr lang="en-US" dirty="0"/>
-              <a:t>The motivation actually matters here. Students need to really understand that side effects would fire uncontrollably if you just put them in the render body - otherwise </a:t>
-            </a:r>
-            <a:r>
-              <a:rPr lang="en-US" dirty="0" err="1"/>
-              <a:t>useEffect</a:t>
-            </a:r>
-            <a:r>
-              <a:rPr lang="en-US" dirty="0"/>
-              <a:t> looks like extra ceremony for no reason. </a:t>
-            </a:r>
-            <a:r>
-              <a:rPr lang="en-US" dirty="0" err="1"/>
-              <a:t>useEffect</a:t>
-            </a:r>
-            <a:r>
-              <a:rPr lang="en-US" dirty="0"/>
-              <a:t> is the controlled way to do anything that touches the outside world, and the reason it exists at all is that the render body is the wrong place.</a:t>
-            </a:r>
-            <a:endParaRPr dirty="0"/>
-          </a:p>
+          <a:p/>
         </p:txBody>
       </p:sp>
       <p:sp>
@@ -2749,38 +2322,7 @@
             <a:noAutofit/>
           </a:bodyPr>
           <a:lstStyle/>
-          <a:p>
-            <a:pPr marL="0" lvl="0" indent="0" algn="l" rtl="0">
-              <a:spcBef>
-                <a:spcPts val="0"/>
-              </a:spcBef>
-              <a:spcAft>
-                <a:spcPts val="0"/>
-              </a:spcAft>
-              <a:buNone/>
-            </a:pPr>
-            <a:r>
-              <a:rPr lang="en-US" dirty="0"/>
-              <a:t>The motivation actually matters here. Students need to really understand that side effects would fire uncontrollably if you just put them in the render body - otherwise </a:t>
-            </a:r>
-            <a:r>
-              <a:rPr lang="en-US" dirty="0" err="1"/>
-              <a:t>useEffect</a:t>
-            </a:r>
-            <a:r>
-              <a:rPr lang="en-US" dirty="0"/>
-              <a:t> looks like extra ceremony for no reason. </a:t>
-            </a:r>
-            <a:r>
-              <a:rPr lang="en-US" dirty="0" err="1"/>
-              <a:t>useEffect</a:t>
-            </a:r>
-            <a:r>
-              <a:rPr lang="en-US" dirty="0"/>
-              <a:t> is the controlled way to do anything that touches the outside world, and the reason it exists at all is that the render body is the wrong place.</a:t>
-            </a:r>
-            <a:endParaRPr dirty="0"/>
-          </a:p>
+          <a:p/>
         </p:txBody>
       </p:sp>
       <p:sp>
@@ -2924,20 +2466,9 @@
           </a:bodyPr>
           <a:lstStyle/>
           <a:p>
-            <a:pPr marL="0" lvl="0" indent="0" algn="l" rtl="0">
-              <a:spcBef>
-                <a:spcPts val="0"/>
-              </a:spcBef>
-              <a:spcAft>
-                <a:spcPts val="0"/>
-              </a:spcAft>
-              <a:buNone/>
-            </a:pPr>
-            <a:r>
-              <a:rPr lang="en-US" dirty="0"/>
-              <a:t>Don't reveal yet - this is a call-on-someone slide. Show of hands for each option. Most students go with (a) because the code 'looks right.' A few will sniff out (b) because they remember the 6.1 thread about pure functions. Take the temperature, then click to the next slide for the explanation. The two reasons you want them to discover: (1) React doesn't know to re-render - nothing triggers it. (2) Even if it did re-run the function, `let count = 0` would just reset to zero again. The compound failure is what makes the answer (b) rather than something more interesting.</a:t>
-            </a:r>
-            <a:endParaRPr dirty="0"/>
+            <a:r>
+              <a:t>Show of hands. Answer (b): no re-render triggered, and `let count = 0` resets anyway.</a:t>
+            </a:r>
           </a:p>
         </p:txBody>
       </p:sp>
@@ -3082,28 +2613,9 @@
           </a:bodyPr>
           <a:lstStyle/>
           <a:p>
-            <a:pPr marL="0" lvl="0" indent="0" algn="l" rtl="0">
-              <a:spcBef>
-                <a:spcPts val="0"/>
-              </a:spcBef>
-              <a:spcAft>
-                <a:spcPts val="0"/>
-              </a:spcAft>
-              <a:buNone/>
-            </a:pPr>
-            <a:r>
-              <a:rPr lang="en-US" dirty="0"/>
-              <a:t>The deps array is the part students consistently get wrong. Walk them through the decision tree out loud: always want to run once on mount? Use []. Want to re-run when some prop or state changes? List it. Never want to think about it at all? That's usually a sign the effect should just be called directly in a handler instead of sitting in </a:t>
-            </a:r>
-            <a:r>
-              <a:rPr lang="en-US" dirty="0" err="1"/>
-              <a:t>useEffect</a:t>
-            </a:r>
-            <a:r>
-              <a:rPr lang="en-US" dirty="0"/>
-              <a:t>.</a:t>
-            </a:r>
-            <a:endParaRPr dirty="0"/>
+            <a:r>
+              <a:t>Decision tree aloud. No obvious deps? Effect probably belongs in a handler instead.</a:t>
+            </a:r>
           </a:p>
         </p:txBody>
       </p:sp>
@@ -3248,28 +2760,9 @@
           </a:bodyPr>
           <a:lstStyle/>
           <a:p>
-            <a:pPr marL="0" lvl="0" indent="0" algn="l" rtl="0">
-              <a:spcBef>
-                <a:spcPts val="0"/>
-              </a:spcBef>
-              <a:spcAft>
-                <a:spcPts val="0"/>
-              </a:spcAft>
-              <a:buNone/>
-            </a:pPr>
-            <a:r>
-              <a:rPr lang="en-US" dirty="0"/>
-              <a:t>The deps array is the part students consistently get wrong. Walk them through the decision tree out loud: always want to run once on mount? Use []. Want to re-run when some prop or state changes? List it. Never want to think about it at all? That's usually a sign the effect should just be called directly in a handler instead of sitting in </a:t>
-            </a:r>
-            <a:r>
-              <a:rPr lang="en-US" dirty="0" err="1"/>
-              <a:t>useEffect</a:t>
-            </a:r>
-            <a:r>
-              <a:rPr lang="en-US" dirty="0"/>
-              <a:t>.</a:t>
-            </a:r>
-            <a:endParaRPr dirty="0"/>
+            <a:r>
+              <a:t>Decision tree aloud. No obvious deps? Effect probably belongs in a handler instead.</a:t>
+            </a:r>
           </a:p>
         </p:txBody>
       </p:sp>
@@ -3414,36 +2907,9 @@
           </a:bodyPr>
           <a:lstStyle/>
           <a:p>
-            <a:pPr marL="0" lvl="0" indent="0" algn="l" rtl="0">
-              <a:spcBef>
-                <a:spcPts val="0"/>
-              </a:spcBef>
-              <a:spcAft>
-                <a:spcPts val="0"/>
-              </a:spcAft>
-              <a:buNone/>
-            </a:pPr>
-            <a:r>
-              <a:rPr lang="en-US" dirty="0"/>
-              <a:t>Right answer is (a). Walk through the wrong ones, since they're each a real bug students will eventually write: (b) [messages] is an infinite loop - effect runs, </a:t>
-            </a:r>
-            <a:r>
-              <a:rPr lang="en-US" dirty="0" err="1"/>
-              <a:t>setMessages</a:t>
-            </a:r>
-            <a:r>
-              <a:rPr lang="en-US" dirty="0"/>
-              <a:t> updates messages, deps array changed, effect runs again, repeat forever. This one really does bite. (c) no array means the effect runs after EVERY render - every state change anywhere in the component triggers a re-fetch. Also basically infinite. (d) [</a:t>
-            </a:r>
-            <a:r>
-              <a:rPr lang="en-US" dirty="0" err="1"/>
-              <a:t>setMessages</a:t>
-            </a:r>
-            <a:r>
-              <a:rPr lang="en-US" dirty="0"/>
-              <a:t>] technically works because React guarantees the setter identity is stable across renders, so it's equivalent to []. But it's misleading - a reader would think the effect depends on the setter, which it doesn't. The rule: list what the effect actually reads from outside. The effect reads nothing from outside, so [] it is.</a:t>
-            </a:r>
-            <a:endParaRPr dirty="0"/>
+            <a:r>
+              <a:t>Answer (a). (b) infinite loop; (c) runs every render; (d) works (stable setter) but misleading.</a:t>
+            </a:r>
           </a:p>
         </p:txBody>
       </p:sp>
@@ -3588,52 +3054,9 @@
           </a:bodyPr>
           <a:lstStyle/>
           <a:p>
-            <a:pPr marL="0" lvl="0" indent="0" algn="l" rtl="0">
-              <a:spcBef>
-                <a:spcPts val="0"/>
-              </a:spcBef>
-              <a:spcAft>
-                <a:spcPts val="0"/>
-              </a:spcAft>
-              <a:buNone/>
-            </a:pPr>
-            <a:r>
-              <a:rPr lang="en-US" dirty="0"/>
-              <a:t>A is broken. The effect captures the </a:t>
-            </a:r>
-            <a:r>
-              <a:rPr lang="en-US" dirty="0" err="1"/>
-              <a:t>userId</a:t>
-            </a:r>
-            <a:r>
-              <a:rPr lang="en-US" dirty="0"/>
-              <a:t> from the first render (snapshot framing again) and never re-fetches when it changes - so when the user navigates from /users/123 to /users/456, the page keeps showing 123's data. B is correct - the effect re-runs whenever </a:t>
-            </a:r>
-            <a:r>
-              <a:rPr lang="en-US" dirty="0" err="1"/>
-              <a:t>userId</a:t>
-            </a:r>
-            <a:r>
-              <a:rPr lang="en-US" dirty="0"/>
-              <a:t> changes, fetching the new user. This is THE stale-closure bug and it's the single most common </a:t>
-            </a:r>
-            <a:r>
-              <a:rPr lang="en-US" dirty="0" err="1"/>
-              <a:t>useEffect</a:t>
-            </a:r>
-            <a:r>
-              <a:rPr lang="en-US" dirty="0"/>
-              <a:t> mistake in the wild. The next slide formalizes the rule and tells them about the </a:t>
-            </a:r>
-            <a:r>
-              <a:rPr lang="en-US" dirty="0" err="1"/>
-              <a:t>ESLint</a:t>
-            </a:r>
-            <a:r>
-              <a:rPr lang="en-US" dirty="0"/>
-              <a:t> plugin that catches this automatically.</a:t>
-            </a:r>
-            <a:endParaRPr dirty="0"/>
+            <a:r>
+              <a:t>A is stuck: effect captured the first render's userId, never refetches. B correct.</a:t>
+            </a:r>
           </a:p>
         </p:txBody>
       </p:sp>
@@ -3778,44 +3201,9 @@
           </a:bodyPr>
           <a:lstStyle/>
           <a:p>
-            <a:pPr marL="0" lvl="0" indent="0" algn="l" rtl="0">
-              <a:spcBef>
-                <a:spcPts val="0"/>
-              </a:spcBef>
-              <a:spcAft>
-                <a:spcPts val="0"/>
-              </a:spcAft>
-              <a:buNone/>
-            </a:pPr>
-            <a:r>
-              <a:rPr lang="en-US" dirty="0"/>
-              <a:t>Stale closures are really the hard part of </a:t>
-            </a:r>
-            <a:r>
-              <a:rPr lang="en-US" dirty="0" err="1"/>
-              <a:t>useEffect</a:t>
-            </a:r>
-            <a:r>
-              <a:rPr lang="en-US" dirty="0"/>
-              <a:t>, and they come from violating the deps rule. Students will hit this once or twice and then internalize the pattern...it's </a:t>
-            </a:r>
-            <a:r>
-              <a:rPr lang="en-US" dirty="0" err="1"/>
-              <a:t>kinda</a:t>
-            </a:r>
-            <a:r>
-              <a:rPr lang="en-US" dirty="0"/>
-              <a:t> a rite of passage. The </a:t>
-            </a:r>
-            <a:r>
-              <a:rPr lang="en-US" dirty="0" err="1"/>
-              <a:t>ESLint</a:t>
-            </a:r>
-            <a:r>
-              <a:rPr lang="en-US" dirty="0"/>
-              <a:t> plugin catches most of it automatically, so recommend they turn it on if they're not already. Push your coding agent to include the right deps rather than fighting the warning.</a:t>
-            </a:r>
-            <a:endParaRPr dirty="0"/>
+            <a:r>
+              <a:t>Ask if they have the React ESLint plugin turned on.</a:t>
+            </a:r>
           </a:p>
         </p:txBody>
       </p:sp>
@@ -3960,44 +3348,9 @@
           </a:bodyPr>
           <a:lstStyle/>
           <a:p>
-            <a:pPr marL="0" lvl="0" indent="0" algn="l" rtl="0">
-              <a:spcBef>
-                <a:spcPts val="0"/>
-              </a:spcBef>
-              <a:spcAft>
-                <a:spcPts val="0"/>
-              </a:spcAft>
-              <a:buNone/>
-            </a:pPr>
-            <a:r>
-              <a:rPr lang="en-US" dirty="0"/>
-              <a:t>Stale closures are really the hard part of </a:t>
-            </a:r>
-            <a:r>
-              <a:rPr lang="en-US" dirty="0" err="1"/>
-              <a:t>useEffect</a:t>
-            </a:r>
-            <a:r>
-              <a:rPr lang="en-US" dirty="0"/>
-              <a:t>, and they come from violating the deps rule. Students will hit this once or twice and then internalize the pattern...it's </a:t>
-            </a:r>
-            <a:r>
-              <a:rPr lang="en-US" dirty="0" err="1"/>
-              <a:t>kinda</a:t>
-            </a:r>
-            <a:r>
-              <a:rPr lang="en-US" dirty="0"/>
-              <a:t> a rite of passage. The </a:t>
-            </a:r>
-            <a:r>
-              <a:rPr lang="en-US" dirty="0" err="1"/>
-              <a:t>ESLint</a:t>
-            </a:r>
-            <a:r>
-              <a:rPr lang="en-US" dirty="0"/>
-              <a:t> plugin catches most of it automatically, so recommend they turn it on if they're not already. Push your coding agent to include the right deps rather than fighting the warning.</a:t>
-            </a:r>
-            <a:endParaRPr dirty="0"/>
+            <a:r>
+              <a:t>Ask if they have the React ESLint plugin turned on.</a:t>
+            </a:r>
           </a:p>
         </p:txBody>
       </p:sp>
@@ -4141,22 +3494,7 @@
             <a:noAutofit/>
           </a:bodyPr>
           <a:lstStyle/>
-          <a:p>
-            <a:pPr marL="0" lvl="0" indent="0" algn="l" rtl="0">
-              <a:spcBef>
-                <a:spcPts val="0"/>
-              </a:spcBef>
-              <a:spcAft>
-                <a:spcPts val="0"/>
-              </a:spcAft>
-              <a:buNone/>
-            </a:pPr>
-            <a:r>
-              <a:rPr lang="en-US" dirty="0"/>
-              <a:t>Just about every data-fetching component out there has this exact shape, and once they recognize it they can point it at any fetch they like. Worth mentioning that libraries like React Query exist specifically to automate this pattern away, but writing it by hand first really builds the intuition for what those libraries are actually doing for you under the hood.</a:t>
-            </a:r>
-            <a:endParaRPr dirty="0"/>
-          </a:p>
+          <a:p/>
         </p:txBody>
       </p:sp>
       <p:sp>
@@ -4300,36 +3638,9 @@
           </a:bodyPr>
           <a:lstStyle/>
           <a:p>
-            <a:pPr marL="0" lvl="0" indent="0" algn="l" rtl="0">
-              <a:spcBef>
-                <a:spcPts val="0"/>
-              </a:spcBef>
-              <a:spcAft>
-                <a:spcPts val="0"/>
-              </a:spcAft>
-              <a:buNone/>
-            </a:pPr>
-            <a:r>
-              <a:rPr lang="en-US" dirty="0"/>
-              <a:t>Walk through every piece of this slowly. Three </a:t>
-            </a:r>
-            <a:r>
-              <a:rPr lang="en-US" dirty="0" err="1"/>
-              <a:t>useState</a:t>
-            </a:r>
-            <a:r>
-              <a:rPr lang="en-US" dirty="0"/>
-              <a:t> calls, one </a:t>
-            </a:r>
-            <a:r>
-              <a:rPr lang="en-US" dirty="0" err="1"/>
-              <a:t>useEffect</a:t>
-            </a:r>
-            <a:r>
-              <a:rPr lang="en-US" dirty="0"/>
-              <a:t> with [] deps, try/catch/finally for the three branches, conditional rendering with early returns. This is the single most copied piece of React code in the industry...students should be able to reproduce it from memory by the end of the week, because it's going to show up in their final project somewhere almost for sure.</a:t>
-            </a:r>
-            <a:endParaRPr dirty="0"/>
+            <a:r>
+              <a:t>Expect this in their final project; walk through each piece.</a:t>
+            </a:r>
           </a:p>
         </p:txBody>
       </p:sp>
@@ -4474,36 +3785,9 @@
           </a:bodyPr>
           <a:lstStyle/>
           <a:p>
-            <a:pPr marL="0" lvl="0" indent="0" algn="l" rtl="0">
-              <a:spcBef>
-                <a:spcPts val="0"/>
-              </a:spcBef>
-              <a:spcAft>
-                <a:spcPts val="0"/>
-              </a:spcAft>
-              <a:buNone/>
-            </a:pPr>
-            <a:r>
-              <a:rPr lang="en-US" dirty="0"/>
-              <a:t>Walk through every piece of this slowly. Three </a:t>
-            </a:r>
-            <a:r>
-              <a:rPr lang="en-US" dirty="0" err="1"/>
-              <a:t>useState</a:t>
-            </a:r>
-            <a:r>
-              <a:rPr lang="en-US" dirty="0"/>
-              <a:t> calls, one </a:t>
-            </a:r>
-            <a:r>
-              <a:rPr lang="en-US" dirty="0" err="1"/>
-              <a:t>useEffect</a:t>
-            </a:r>
-            <a:r>
-              <a:rPr lang="en-US" dirty="0"/>
-              <a:t> with [] deps, try/catch/finally for the three branches, conditional rendering with early returns. This is the single most copied piece of React code in the industry...students should be able to reproduce it from memory by the end of the week, because it's going to show up in their final project somewhere almost for sure.</a:t>
-            </a:r>
-            <a:endParaRPr dirty="0"/>
+            <a:r>
+              <a:t>Expect this in their final project; walk through each piece.</a:t>
+            </a:r>
           </a:p>
         </p:txBody>
       </p:sp>
@@ -4648,36 +3932,9 @@
           </a:bodyPr>
           <a:lstStyle/>
           <a:p>
-            <a:pPr marL="0" lvl="0" indent="0" algn="l" rtl="0">
-              <a:spcBef>
-                <a:spcPts val="0"/>
-              </a:spcBef>
-              <a:spcAft>
-                <a:spcPts val="0"/>
-              </a:spcAft>
-              <a:buNone/>
-            </a:pPr>
-            <a:r>
-              <a:rPr lang="en-US" dirty="0"/>
-              <a:t>Walk through every piece of this slowly. Three </a:t>
-            </a:r>
-            <a:r>
-              <a:rPr lang="en-US" dirty="0" err="1"/>
-              <a:t>useState</a:t>
-            </a:r>
-            <a:r>
-              <a:rPr lang="en-US" dirty="0"/>
-              <a:t> calls, one </a:t>
-            </a:r>
-            <a:r>
-              <a:rPr lang="en-US" dirty="0" err="1"/>
-              <a:t>useEffect</a:t>
-            </a:r>
-            <a:r>
-              <a:rPr lang="en-US" dirty="0"/>
-              <a:t> with [] deps, try/catch/finally for the three branches, conditional rendering with early returns. This is the single most copied piece of React code in the industry...students should be able to reproduce it from memory by the end of the week, because it's going to show up in their final project somewhere almost for sure.</a:t>
-            </a:r>
-            <a:endParaRPr dirty="0"/>
+            <a:r>
+              <a:t>Expect this in their final project; walk through each piece.</a:t>
+            </a:r>
           </a:p>
         </p:txBody>
       </p:sp>
@@ -4821,22 +4078,7 @@
             <a:noAutofit/>
           </a:bodyPr>
           <a:lstStyle/>
-          <a:p>
-            <a:pPr marL="0" lvl="0" indent="0" algn="l" rtl="0">
-              <a:spcBef>
-                <a:spcPts val="0"/>
-              </a:spcBef>
-              <a:spcAft>
-                <a:spcPts val="0"/>
-              </a:spcAft>
-              <a:buNone/>
-            </a:pPr>
-            <a:r>
-              <a:rPr lang="en-US" dirty="0"/>
-              <a:t>The hook itself. Memory between renders, one line at a time.</a:t>
-            </a:r>
-            <a:endParaRPr dirty="0"/>
-          </a:p>
+          <a:p/>
         </p:txBody>
       </p:sp>
       <p:sp>
@@ -4980,28 +4222,9 @@
           </a:bodyPr>
           <a:lstStyle/>
           <a:p>
-            <a:pPr marL="0" lvl="0" indent="0" algn="l" rtl="0">
-              <a:spcBef>
-                <a:spcPts val="0"/>
-              </a:spcBef>
-              <a:spcAft>
-                <a:spcPts val="0"/>
-              </a:spcAft>
-              <a:buNone/>
-            </a:pPr>
-            <a:r>
-              <a:rPr lang="en-US" dirty="0"/>
-              <a:t>Students really shouldn't reach for React Query in this course - it’s </a:t>
-            </a:r>
-            <a:r>
-              <a:rPr lang="en-US" dirty="0" err="1"/>
-              <a:t>kinda</a:t>
-            </a:r>
-            <a:r>
-              <a:rPr lang="en-US" dirty="0"/>
-              <a:t> overkill, and pulling in a library lets them skip the intuition. But they absolutely should know these libraries exist, because when they go build real projects after this class they WILL use one. Frame it as 'earn the shortcut by doing it the long way once.'</a:t>
-            </a:r>
-            <a:endParaRPr dirty="0"/>
+            <a:r>
+              <a:t>Don't use React Query in this course - do it by hand first.</a:t>
+            </a:r>
           </a:p>
         </p:txBody>
       </p:sp>
@@ -5145,587 +4368,7 @@
             <a:noAutofit/>
           </a:bodyPr>
           <a:lstStyle/>
-          <a:p>
-            <a:pPr marL="0" lvl="0" indent="0" algn="l" rtl="0">
-              <a:spcBef>
-                <a:spcPts val="0"/>
-              </a:spcBef>
-              <a:spcAft>
-                <a:spcPts val="0"/>
-              </a:spcAft>
-              <a:buNone/>
-            </a:pPr>
-            <a:r>
-              <a:rPr lang="en-US" dirty="0"/>
-              <a:t>   const [messages, </a:t>
-            </a:r>
-            <a:r>
-              <a:rPr lang="en-US" dirty="0" err="1"/>
-              <a:t>setMessages</a:t>
-            </a:r>
-            <a:r>
-              <a:rPr lang="en-US" dirty="0"/>
-              <a:t>] = </a:t>
-            </a:r>
-            <a:r>
-              <a:rPr lang="en-US" dirty="0" err="1"/>
-              <a:t>useState</a:t>
-            </a:r>
-            <a:r>
-              <a:rPr lang="en-US" dirty="0"/>
-              <a:t>&lt;Message[]&gt;([]);</a:t>
-            </a:r>
-            <a:endParaRPr dirty="0"/>
-          </a:p>
-          <a:p>
-            <a:pPr marL="0" lvl="0" indent="0" algn="l" rtl="0">
-              <a:spcBef>
-                <a:spcPts val="0"/>
-              </a:spcBef>
-              <a:spcAft>
-                <a:spcPts val="0"/>
-              </a:spcAft>
-              <a:buNone/>
-            </a:pPr>
-            <a:r>
-              <a:rPr lang="en-US" dirty="0"/>
-              <a:t>    const [loading,  </a:t>
-            </a:r>
-            <a:r>
-              <a:rPr lang="en-US" dirty="0" err="1"/>
-              <a:t>setLoading</a:t>
-            </a:r>
-            <a:r>
-              <a:rPr lang="en-US" dirty="0"/>
-              <a:t>]  = </a:t>
-            </a:r>
-            <a:r>
-              <a:rPr lang="en-US" dirty="0" err="1"/>
-              <a:t>useState</a:t>
-            </a:r>
-            <a:r>
-              <a:rPr lang="en-US" dirty="0"/>
-              <a:t>(true);</a:t>
-            </a:r>
-            <a:endParaRPr dirty="0"/>
-          </a:p>
-          <a:p>
-            <a:pPr marL="0" lvl="0" indent="0" algn="l" rtl="0">
-              <a:spcBef>
-                <a:spcPts val="0"/>
-              </a:spcBef>
-              <a:spcAft>
-                <a:spcPts val="0"/>
-              </a:spcAft>
-              <a:buNone/>
-            </a:pPr>
-            <a:r>
-              <a:rPr lang="en-US" dirty="0"/>
-              <a:t>    const [error,    </a:t>
-            </a:r>
-            <a:r>
-              <a:rPr lang="en-US" dirty="0" err="1"/>
-              <a:t>setError</a:t>
-            </a:r>
-            <a:r>
-              <a:rPr lang="en-US" dirty="0"/>
-              <a:t>]    = </a:t>
-            </a:r>
-            <a:r>
-              <a:rPr lang="en-US" dirty="0" err="1"/>
-              <a:t>useState</a:t>
-            </a:r>
-            <a:r>
-              <a:rPr lang="en-US" dirty="0"/>
-              <a:t>&lt;string | null&gt;(null);</a:t>
-            </a:r>
-            <a:endParaRPr dirty="0"/>
-          </a:p>
-          <a:p>
-            <a:pPr marL="0" lvl="0" indent="0" algn="l" rtl="0">
-              <a:spcBef>
-                <a:spcPts val="200"/>
-              </a:spcBef>
-              <a:spcAft>
-                <a:spcPts val="0"/>
-              </a:spcAft>
-              <a:buNone/>
-            </a:pPr>
-            <a:r>
-              <a:rPr lang="en-US" sz="1300" b="1" dirty="0">
-                <a:solidFill>
-                  <a:srgbClr val="333344"/>
-                </a:solidFill>
-                <a:latin typeface="Courier New"/>
-                <a:ea typeface="Courier New"/>
-                <a:cs typeface="Courier New"/>
-                <a:sym typeface="Courier New"/>
-              </a:rPr>
-              <a:t>if (!</a:t>
-            </a:r>
-            <a:r>
-              <a:rPr lang="en-US" sz="1300" b="1" u="sng" dirty="0">
-                <a:solidFill>
-                  <a:schemeClr val="hlink"/>
-                </a:solidFill>
-                <a:latin typeface="Courier New"/>
-                <a:ea typeface="Courier New"/>
-                <a:cs typeface="Courier New"/>
-                <a:sym typeface="Courier New"/>
-                <a:hlinkClick r:id="rId3"/>
-              </a:rPr>
-              <a:t>r.ok</a:t>
-            </a:r>
-            <a:r>
-              <a:rPr lang="en-US" sz="1300" b="1" dirty="0">
-                <a:solidFill>
-                  <a:srgbClr val="333344"/>
-                </a:solidFill>
-                <a:latin typeface="Courier New"/>
-                <a:ea typeface="Courier New"/>
-                <a:cs typeface="Courier New"/>
-                <a:sym typeface="Courier New"/>
-              </a:rPr>
-              <a:t>)</a:t>
-            </a:r>
-            <a:endParaRPr sz="1300" b="1" dirty="0">
-              <a:solidFill>
-                <a:srgbClr val="333344"/>
-              </a:solidFill>
-              <a:latin typeface="Courier New"/>
-              <a:ea typeface="Courier New"/>
-              <a:cs typeface="Courier New"/>
-              <a:sym typeface="Courier New"/>
-            </a:endParaRPr>
-          </a:p>
-          <a:p>
-            <a:pPr marL="0" lvl="0" indent="0" algn="l" rtl="0">
-              <a:spcBef>
-                <a:spcPts val="200"/>
-              </a:spcBef>
-              <a:spcAft>
-                <a:spcPts val="0"/>
-              </a:spcAft>
-              <a:buNone/>
-            </a:pPr>
-            <a:r>
-              <a:rPr lang="en-US" sz="1300" b="1" dirty="0">
-                <a:solidFill>
-                  <a:srgbClr val="333344"/>
-                </a:solidFill>
-                <a:latin typeface="Courier New"/>
-                <a:ea typeface="Courier New"/>
-                <a:cs typeface="Courier New"/>
-                <a:sym typeface="Courier New"/>
-              </a:rPr>
-              <a:t> </a:t>
-            </a:r>
-            <a:r>
-              <a:rPr lang="en-US" sz="1300" b="1" dirty="0" err="1">
-                <a:solidFill>
-                  <a:srgbClr val="333344"/>
-                </a:solidFill>
-                <a:latin typeface="Courier New"/>
-                <a:ea typeface="Courier New"/>
-                <a:cs typeface="Courier New"/>
-                <a:sym typeface="Courier New"/>
-              </a:rPr>
-              <a:t>setMessages</a:t>
-            </a:r>
-            <a:r>
-              <a:rPr lang="en-US" sz="1300" b="1" dirty="0">
-                <a:solidFill>
-                  <a:srgbClr val="333344"/>
-                </a:solidFill>
-                <a:latin typeface="Courier New"/>
-                <a:ea typeface="Courier New"/>
-                <a:cs typeface="Courier New"/>
-                <a:sym typeface="Courier New"/>
-              </a:rPr>
-              <a:t>(await </a:t>
-            </a:r>
-            <a:r>
-              <a:rPr lang="en-US" sz="1300" b="1" dirty="0" err="1">
-                <a:solidFill>
-                  <a:srgbClr val="333344"/>
-                </a:solidFill>
-                <a:latin typeface="Courier New"/>
-                <a:ea typeface="Courier New"/>
-                <a:cs typeface="Courier New"/>
-                <a:sym typeface="Courier New"/>
-              </a:rPr>
-              <a:t>r.json</a:t>
-            </a:r>
-            <a:r>
-              <a:rPr lang="en-US" sz="1300" b="1" dirty="0">
-                <a:solidFill>
-                  <a:srgbClr val="333344"/>
-                </a:solidFill>
-                <a:latin typeface="Courier New"/>
-                <a:ea typeface="Courier New"/>
-                <a:cs typeface="Courier New"/>
-                <a:sym typeface="Courier New"/>
-              </a:rPr>
-              <a:t>()); </a:t>
-            </a:r>
-            <a:endParaRPr sz="1300" b="1" dirty="0">
-              <a:solidFill>
-                <a:srgbClr val="333344"/>
-              </a:solidFill>
-              <a:latin typeface="Courier New"/>
-              <a:ea typeface="Courier New"/>
-              <a:cs typeface="Courier New"/>
-              <a:sym typeface="Courier New"/>
-            </a:endParaRPr>
-          </a:p>
-          <a:p>
-            <a:pPr marL="0" lvl="0" indent="0" algn="l" rtl="0">
-              <a:spcBef>
-                <a:spcPts val="200"/>
-              </a:spcBef>
-              <a:spcAft>
-                <a:spcPts val="0"/>
-              </a:spcAft>
-              <a:buNone/>
-            </a:pPr>
-            <a:r>
-              <a:rPr lang="en-US" sz="1300" b="1" dirty="0" err="1">
-                <a:solidFill>
-                  <a:srgbClr val="333344"/>
-                </a:solidFill>
-                <a:latin typeface="Courier New"/>
-                <a:ea typeface="Courier New"/>
-                <a:cs typeface="Courier New"/>
-                <a:sym typeface="Courier New"/>
-              </a:rPr>
-              <a:t>setLoading</a:t>
-            </a:r>
-            <a:r>
-              <a:rPr lang="en-US" sz="1300" b="1" dirty="0">
-                <a:solidFill>
-                  <a:srgbClr val="333344"/>
-                </a:solidFill>
-                <a:latin typeface="Courier New"/>
-                <a:ea typeface="Courier New"/>
-                <a:cs typeface="Courier New"/>
-                <a:sym typeface="Courier New"/>
-              </a:rPr>
-              <a:t>(false);</a:t>
-            </a:r>
-            <a:endParaRPr sz="1300" b="1" dirty="0">
-              <a:solidFill>
-                <a:srgbClr val="333344"/>
-              </a:solidFill>
-              <a:latin typeface="Courier New"/>
-              <a:ea typeface="Courier New"/>
-              <a:cs typeface="Courier New"/>
-              <a:sym typeface="Courier New"/>
-            </a:endParaRPr>
-          </a:p>
-          <a:p>
-            <a:pPr marL="0" lvl="0" indent="0" algn="l" rtl="0">
-              <a:spcBef>
-                <a:spcPts val="200"/>
-              </a:spcBef>
-              <a:spcAft>
-                <a:spcPts val="0"/>
-              </a:spcAft>
-              <a:buNone/>
-            </a:pPr>
-            <a:r>
-              <a:rPr lang="en-US" sz="1300" b="1" dirty="0" err="1">
-                <a:solidFill>
-                  <a:srgbClr val="333344"/>
-                </a:solidFill>
-                <a:latin typeface="Courier New"/>
-                <a:ea typeface="Courier New"/>
-                <a:cs typeface="Courier New"/>
-                <a:sym typeface="Courier New"/>
-              </a:rPr>
-              <a:t>useEffect</a:t>
-            </a:r>
-            <a:endParaRPr sz="1300" b="1" dirty="0">
-              <a:solidFill>
-                <a:srgbClr val="333344"/>
-              </a:solidFill>
-              <a:latin typeface="Courier New"/>
-              <a:ea typeface="Courier New"/>
-              <a:cs typeface="Courier New"/>
-              <a:sym typeface="Courier New"/>
-            </a:endParaRPr>
-          </a:p>
-          <a:p>
-            <a:pPr marL="0" lvl="0" indent="0" algn="l" rtl="0">
-              <a:spcBef>
-                <a:spcPts val="200"/>
-              </a:spcBef>
-              <a:spcAft>
-                <a:spcPts val="0"/>
-              </a:spcAft>
-              <a:buNone/>
-            </a:pPr>
-            <a:r>
-              <a:rPr lang="en-US" sz="1300" b="1" dirty="0">
-                <a:solidFill>
-                  <a:srgbClr val="333344"/>
-                </a:solidFill>
-                <a:latin typeface="Courier New"/>
-                <a:ea typeface="Courier New"/>
-                <a:cs typeface="Courier New"/>
-                <a:sym typeface="Courier New"/>
-              </a:rPr>
-              <a:t>    }, []);</a:t>
-            </a:r>
-            <a:endParaRPr dirty="0">
-              <a:solidFill>
-                <a:schemeClr val="dk1"/>
-              </a:solidFill>
-            </a:endParaRPr>
-          </a:p>
-          <a:p>
-            <a:pPr marL="0" lvl="0" indent="0" algn="l" rtl="0">
-              <a:spcBef>
-                <a:spcPts val="200"/>
-              </a:spcBef>
-              <a:spcAft>
-                <a:spcPts val="0"/>
-              </a:spcAft>
-              <a:buNone/>
-            </a:pPr>
-            <a:r>
-              <a:rPr lang="en-US" sz="1300" b="1" dirty="0">
-                <a:solidFill>
-                  <a:srgbClr val="333344"/>
-                </a:solidFill>
-                <a:latin typeface="Courier New"/>
-                <a:ea typeface="Courier New"/>
-                <a:cs typeface="Courier New"/>
-                <a:sym typeface="Courier New"/>
-              </a:rPr>
-              <a:t>    if (loading) return &lt;p&gt;Loading...&lt;/p&gt;;</a:t>
-            </a:r>
-            <a:endParaRPr dirty="0">
-              <a:solidFill>
-                <a:schemeClr val="dk1"/>
-              </a:solidFill>
-            </a:endParaRPr>
-          </a:p>
-          <a:p>
-            <a:pPr marL="0" lvl="0" indent="0" algn="l" rtl="0">
-              <a:spcBef>
-                <a:spcPts val="200"/>
-              </a:spcBef>
-              <a:spcAft>
-                <a:spcPts val="0"/>
-              </a:spcAft>
-              <a:buNone/>
-            </a:pPr>
-            <a:r>
-              <a:rPr lang="en-US" sz="1300" b="1" dirty="0">
-                <a:solidFill>
-                  <a:srgbClr val="333344"/>
-                </a:solidFill>
-                <a:latin typeface="Courier New"/>
-                <a:ea typeface="Courier New"/>
-                <a:cs typeface="Courier New"/>
-                <a:sym typeface="Courier New"/>
-              </a:rPr>
-              <a:t>    if (error)   return &lt;p&gt;Failed: {error}&lt;/p&gt;;</a:t>
-            </a:r>
-            <a:endParaRPr dirty="0">
-              <a:solidFill>
-                <a:schemeClr val="dk1"/>
-              </a:solidFill>
-            </a:endParaRPr>
-          </a:p>
-          <a:p>
-            <a:pPr marL="0" lvl="0" indent="0" algn="l" rtl="0">
-              <a:spcBef>
-                <a:spcPts val="200"/>
-              </a:spcBef>
-              <a:spcAft>
-                <a:spcPts val="0"/>
-              </a:spcAft>
-              <a:buNone/>
-            </a:pPr>
-            <a:r>
-              <a:rPr lang="en-US" sz="1300" b="1" dirty="0">
-                <a:solidFill>
-                  <a:srgbClr val="333344"/>
-                </a:solidFill>
-                <a:latin typeface="Courier New"/>
-                <a:ea typeface="Courier New"/>
-                <a:cs typeface="Courier New"/>
-                <a:sym typeface="Courier New"/>
-              </a:rPr>
-              <a:t>    return &lt;ul&gt;{</a:t>
-            </a:r>
-            <a:r>
-              <a:rPr lang="en-US" sz="1300" b="1" dirty="0" err="1">
-                <a:solidFill>
-                  <a:srgbClr val="333344"/>
-                </a:solidFill>
-                <a:latin typeface="Courier New"/>
-                <a:ea typeface="Courier New"/>
-                <a:cs typeface="Courier New"/>
-                <a:sym typeface="Courier New"/>
-              </a:rPr>
-              <a:t>messages.map</a:t>
-            </a:r>
-            <a:r>
-              <a:rPr lang="en-US" sz="1300" b="1" dirty="0">
-                <a:solidFill>
-                  <a:srgbClr val="333344"/>
-                </a:solidFill>
-                <a:latin typeface="Courier New"/>
-                <a:ea typeface="Courier New"/>
-                <a:cs typeface="Courier New"/>
-                <a:sym typeface="Courier New"/>
-              </a:rPr>
-              <a:t>(m =&gt; (</a:t>
-            </a:r>
-            <a:endParaRPr dirty="0">
-              <a:solidFill>
-                <a:schemeClr val="dk1"/>
-              </a:solidFill>
-            </a:endParaRPr>
-          </a:p>
-          <a:p>
-            <a:pPr marL="0" lvl="0" indent="0" algn="l" rtl="0">
-              <a:spcBef>
-                <a:spcPts val="200"/>
-              </a:spcBef>
-              <a:spcAft>
-                <a:spcPts val="0"/>
-              </a:spcAft>
-              <a:buNone/>
-            </a:pPr>
-            <a:r>
-              <a:rPr lang="en-US" sz="1300" b="1" dirty="0">
-                <a:solidFill>
-                  <a:srgbClr val="333344"/>
-                </a:solidFill>
-                <a:latin typeface="Courier New"/>
-                <a:ea typeface="Courier New"/>
-                <a:cs typeface="Courier New"/>
-                <a:sym typeface="Courier New"/>
-              </a:rPr>
-              <a:t>        &lt;li key={</a:t>
-            </a:r>
-            <a:r>
-              <a:rPr lang="en-US" sz="1300" b="1" dirty="0" err="1">
-                <a:solidFill>
-                  <a:srgbClr val="333344"/>
-                </a:solidFill>
-                <a:latin typeface="Courier New"/>
-                <a:ea typeface="Courier New"/>
-                <a:cs typeface="Courier New"/>
-                <a:sym typeface="Courier New"/>
-              </a:rPr>
-              <a:t>m.id</a:t>
-            </a:r>
-            <a:r>
-              <a:rPr lang="en-US" sz="1300" b="1" dirty="0">
-                <a:solidFill>
-                  <a:srgbClr val="333344"/>
-                </a:solidFill>
-                <a:latin typeface="Courier New"/>
-                <a:ea typeface="Courier New"/>
-                <a:cs typeface="Courier New"/>
-                <a:sym typeface="Courier New"/>
-              </a:rPr>
-              <a:t>}&gt;&lt;b&gt;{</a:t>
-            </a:r>
-            <a:r>
-              <a:rPr lang="en-US" sz="1300" b="1" dirty="0" err="1">
-                <a:solidFill>
-                  <a:srgbClr val="333344"/>
-                </a:solidFill>
-                <a:latin typeface="Courier New"/>
-                <a:ea typeface="Courier New"/>
-                <a:cs typeface="Courier New"/>
-                <a:sym typeface="Courier New"/>
-              </a:rPr>
-              <a:t>m.author</a:t>
-            </a:r>
-            <a:r>
-              <a:rPr lang="en-US" sz="1300" b="1" dirty="0">
-                <a:solidFill>
-                  <a:srgbClr val="333344"/>
-                </a:solidFill>
-                <a:latin typeface="Courier New"/>
-                <a:ea typeface="Courier New"/>
-                <a:cs typeface="Courier New"/>
-                <a:sym typeface="Courier New"/>
-              </a:rPr>
-              <a:t>}:&lt;/b&gt; {</a:t>
-            </a:r>
-            <a:r>
-              <a:rPr lang="en-US" sz="1300" b="1" dirty="0" err="1">
-                <a:solidFill>
-                  <a:srgbClr val="333344"/>
-                </a:solidFill>
-                <a:latin typeface="Courier New"/>
-                <a:ea typeface="Courier New"/>
-                <a:cs typeface="Courier New"/>
-                <a:sym typeface="Courier New"/>
-              </a:rPr>
-              <a:t>m.text</a:t>
-            </a:r>
-            <a:r>
-              <a:rPr lang="en-US" sz="1300" b="1" dirty="0">
-                <a:solidFill>
-                  <a:srgbClr val="333344"/>
-                </a:solidFill>
-                <a:latin typeface="Courier New"/>
-                <a:ea typeface="Courier New"/>
-                <a:cs typeface="Courier New"/>
-                <a:sym typeface="Courier New"/>
-              </a:rPr>
-              <a:t>}&lt;/li&gt;</a:t>
-            </a:r>
-            <a:endParaRPr dirty="0">
-              <a:solidFill>
-                <a:schemeClr val="dk1"/>
-              </a:solidFill>
-            </a:endParaRPr>
-          </a:p>
-          <a:p>
-            <a:pPr marL="0" lvl="0" indent="0" algn="l" rtl="0">
-              <a:spcBef>
-                <a:spcPts val="200"/>
-              </a:spcBef>
-              <a:spcAft>
-                <a:spcPts val="0"/>
-              </a:spcAft>
-              <a:buClr>
-                <a:schemeClr val="dk1"/>
-              </a:buClr>
-              <a:buFont typeface="Arial"/>
-              <a:buNone/>
-            </a:pPr>
-            <a:r>
-              <a:rPr lang="en-US" sz="1300" b="1" dirty="0">
-                <a:solidFill>
-                  <a:srgbClr val="333344"/>
-                </a:solidFill>
-                <a:latin typeface="Courier New"/>
-                <a:ea typeface="Courier New"/>
-                <a:cs typeface="Courier New"/>
-                <a:sym typeface="Courier New"/>
-              </a:rPr>
-              <a:t>    ))}&lt;/ul&gt;;</a:t>
-            </a:r>
-            <a:endParaRPr sz="1300" b="1" dirty="0">
-              <a:solidFill>
-                <a:srgbClr val="333344"/>
-              </a:solidFill>
-              <a:latin typeface="Courier New"/>
-              <a:ea typeface="Courier New"/>
-              <a:cs typeface="Courier New"/>
-              <a:sym typeface="Courier New"/>
-            </a:endParaRPr>
-          </a:p>
+          <a:p/>
         </p:txBody>
       </p:sp>
       <p:sp>
@@ -5869,20 +4512,9 @@
           </a:bodyPr>
           <a:lstStyle/>
           <a:p>
-            <a:pPr marL="0" lvl="0" indent="0" algn="l" rtl="0">
-              <a:spcBef>
-                <a:spcPts val="0"/>
-              </a:spcBef>
-              <a:spcAft>
-                <a:spcPts val="0"/>
-              </a:spcAft>
-              <a:buNone/>
-            </a:pPr>
-            <a:r>
-              <a:rPr lang="en-US"/>
-              <a:t>Walk through each answer. This is the EXACT same shape as the TodoList from earlier - the only things that change are the data shape and the rendered content. Once students see that the pattern generalizes, they can apply it to literally any endpoint in their final project without thinking much about it.</a:t>
-            </a:r>
-            <a:endParaRPr/>
+            <a:r>
+              <a:t>Same shape as the TodoList; only data shape and rendering change.</a:t>
+            </a:r>
           </a:p>
         </p:txBody>
       </p:sp>
@@ -6026,30 +4658,7 @@
             <a:noAutofit/>
           </a:bodyPr>
           <a:lstStyle/>
-          <a:p>
-            <a:pPr marL="0" lvl="0" indent="0" algn="l" rtl="0">
-              <a:spcBef>
-                <a:spcPts val="0"/>
-              </a:spcBef>
-              <a:spcAft>
-                <a:spcPts val="0"/>
-              </a:spcAft>
-              <a:buNone/>
-            </a:pPr>
-            <a:r>
-              <a:rPr lang="en-US" dirty="0"/>
-              <a:t>Pivot from the loading/error/data fetch (which fires once) to the next obvious question: what if the data on the server keeps changing? In a chat-style app, one user's post should show up in another user's browser without a refresh. The simplest way to get there is polling - and polling is the perfect motivator for the cleanup function in </a:t>
-            </a:r>
-            <a:r>
-              <a:rPr lang="en-US" dirty="0" err="1"/>
-              <a:t>useEffect</a:t>
-            </a:r>
-            <a:r>
-              <a:rPr lang="en-US" dirty="0"/>
-              <a:t>, since without cleanup it's a textbook resource leak.</a:t>
-            </a:r>
-            <a:endParaRPr dirty="0"/>
-          </a:p>
+          <a:p/>
         </p:txBody>
       </p:sp>
       <p:sp>
@@ -6193,28 +4802,9 @@
           </a:bodyPr>
           <a:lstStyle/>
           <a:p>
-            <a:pPr marL="0" lvl="0" indent="0" algn="l" rtl="0">
-              <a:spcBef>
-                <a:spcPts val="0"/>
-              </a:spcBef>
-              <a:spcAft>
-                <a:spcPts val="0"/>
-              </a:spcAft>
-              <a:buNone/>
-            </a:pPr>
-            <a:r>
-              <a:rPr lang="en-US" dirty="0"/>
-              <a:t>Set up the use case in the BBS frame from A4. Students really feel the gap here - they've built a working /</a:t>
-            </a:r>
-            <a:r>
-              <a:rPr lang="en-US" dirty="0" err="1"/>
-              <a:t>api</a:t>
-            </a:r>
-            <a:r>
-              <a:rPr lang="en-US" dirty="0"/>
-              <a:t>/messages endpoint in A2, and a working frontend that lists messages in A4, and somehow the thing still feels janky because new messages don't appear. The fix is small, and it's the natural setup for cleanup functions a couple slides from now.</a:t>
-            </a:r>
-            <a:endParaRPr dirty="0"/>
+            <a:r>
+              <a:t>BBS frame: A2 /api/messages endpoint plus A4 frontend, new messages still don't appear.</a:t>
+            </a:r>
           </a:p>
         </p:txBody>
       </p:sp>
@@ -6359,28 +4949,9 @@
           </a:bodyPr>
           <a:lstStyle/>
           <a:p>
-            <a:pPr marL="0" lvl="0" indent="0" algn="l" rtl="0">
-              <a:spcBef>
-                <a:spcPts val="0"/>
-              </a:spcBef>
-              <a:spcAft>
-                <a:spcPts val="0"/>
-              </a:spcAft>
-              <a:buNone/>
-            </a:pPr>
-            <a:r>
-              <a:rPr lang="en-US" dirty="0"/>
-              <a:t>Set up the use case in the BBS frame from A4. Students really feel the gap here - they've built a working /</a:t>
-            </a:r>
-            <a:r>
-              <a:rPr lang="en-US" dirty="0" err="1"/>
-              <a:t>api</a:t>
-            </a:r>
-            <a:r>
-              <a:rPr lang="en-US" dirty="0"/>
-              <a:t>/messages endpoint in A2, and a working frontend that lists messages in A4, and somehow the thing still feels janky because new messages don't appear. The fix is small, and it's the natural setup for cleanup functions a couple slides from now.</a:t>
-            </a:r>
-            <a:endParaRPr dirty="0"/>
+            <a:r>
+              <a:t>BBS frame: A2 /api/messages endpoint plus A4 frontend, new messages still don't appear.</a:t>
+            </a:r>
           </a:p>
         </p:txBody>
       </p:sp>
@@ -6525,44 +5096,9 @@
           </a:bodyPr>
           <a:lstStyle/>
           <a:p>
-            <a:pPr marL="0" lvl="0" indent="0" algn="l" rtl="0">
-              <a:spcBef>
-                <a:spcPts val="0"/>
-              </a:spcBef>
-              <a:spcAft>
-                <a:spcPts val="0"/>
-              </a:spcAft>
-              <a:buNone/>
-            </a:pPr>
-            <a:r>
-              <a:rPr lang="en-US" dirty="0"/>
-              <a:t>Walk through the happy path first: </a:t>
-            </a:r>
-            <a:r>
-              <a:rPr lang="en-US" dirty="0" err="1"/>
-              <a:t>setInterval</a:t>
-            </a:r>
-            <a:r>
-              <a:rPr lang="en-US" dirty="0"/>
-              <a:t> fires load() every 2 seconds, load() calls </a:t>
-            </a:r>
-            <a:r>
-              <a:rPr lang="en-US" dirty="0" err="1"/>
-              <a:t>setMessages</a:t>
-            </a:r>
-            <a:r>
-              <a:rPr lang="en-US" dirty="0"/>
-              <a:t>, that triggers a re-render, the new posts show up. That part actually works and it's worth pausing on - this is the whole feature in five lines. Then turn to the bug. The interval is a number tracked by the JS event loop, not by React, so unmounting the component doesn't stop it. The interval keeps firing, hits a stale </a:t>
-            </a:r>
-            <a:r>
-              <a:rPr lang="en-US" dirty="0" err="1"/>
-              <a:t>setMessages</a:t>
-            </a:r>
-            <a:r>
-              <a:rPr lang="en-US" dirty="0"/>
-              <a:t>, and React grumbles. In dev it's a warning, in production it's a slow leak that gets worse the more the user navigates around. The fix is the cleanup function on the next slide.</a:t>
-            </a:r>
-            <a:endParaRPr dirty="0"/>
+            <a:r>
+              <a:t>Happy path first. Bug: event loop owns the interval, survives unmount. Dev warning, prod leak.</a:t>
+            </a:r>
           </a:p>
         </p:txBody>
       </p:sp>
@@ -6707,28 +5243,9 @@
           </a:bodyPr>
           <a:lstStyle/>
           <a:p>
-            <a:pPr marL="0" lvl="0" indent="0" algn="l" rtl="0">
-              <a:spcBef>
-                <a:spcPts val="0"/>
-              </a:spcBef>
-              <a:spcAft>
-                <a:spcPts val="0"/>
-              </a:spcAft>
-              <a:buNone/>
-            </a:pPr>
-            <a:r>
-              <a:rPr lang="en-US" dirty="0"/>
-              <a:t>Cleanup is the second-most-important thing about </a:t>
-            </a:r>
-            <a:r>
-              <a:rPr lang="en-US" dirty="0" err="1"/>
-              <a:t>useEffect</a:t>
-            </a:r>
-            <a:r>
-              <a:rPr lang="en-US" dirty="0"/>
-              <a:t> after the deps array, and it's the part students skip until something breaks. The mental model that sticks: the effect is a setup phase, the returned function is the matching teardown, and the pair has to balance. If the effect doesn't start anything external (e.g. it's just a fetch with no timer or subscription), no cleanup is needed. If it starts a timer / listener / socket - always cleanup. The pattern carries over to literally every real React app they'll ever touch.</a:t>
-            </a:r>
-            <a:endParaRPr dirty="0"/>
+            <a:r>
+              <a:t>Analogue to memory management. Plain fetch with no timer/subscription needs no cleanup.</a:t>
+            </a:r>
           </a:p>
         </p:txBody>
       </p:sp>
@@ -6873,68 +5390,9 @@
           </a:bodyPr>
           <a:lstStyle/>
           <a:p>
-            <a:pPr marL="0" lvl="0" indent="0" algn="l" rtl="0">
-              <a:spcBef>
-                <a:spcPts val="0"/>
-              </a:spcBef>
-              <a:spcAft>
-                <a:spcPts val="0"/>
-              </a:spcAft>
-              <a:buNone/>
-            </a:pPr>
-            <a:endParaRPr dirty="0"/>
-          </a:p>
-          <a:p>
-            <a:pPr marL="0" lvl="0" indent="0" algn="l" rtl="0">
-              <a:spcBef>
-                <a:spcPts val="0"/>
-              </a:spcBef>
-              <a:spcAft>
-                <a:spcPts val="0"/>
-              </a:spcAft>
-              <a:buNone/>
-            </a:pPr>
-            <a:r>
-              <a:rPr lang="en-US" dirty="0"/>
-              <a:t>Analogue to memory management</a:t>
-            </a:r>
-            <a:endParaRPr dirty="0"/>
-          </a:p>
-          <a:p>
-            <a:pPr marL="0" lvl="0" indent="0" algn="l" rtl="0">
-              <a:spcBef>
-                <a:spcPts val="0"/>
-              </a:spcBef>
-              <a:spcAft>
-                <a:spcPts val="0"/>
-              </a:spcAft>
-              <a:buNone/>
-            </a:pPr>
-            <a:endParaRPr dirty="0"/>
-          </a:p>
-          <a:p>
-            <a:pPr marL="0" lvl="0" indent="0" algn="l" rtl="0">
-              <a:spcBef>
-                <a:spcPts val="0"/>
-              </a:spcBef>
-              <a:spcAft>
-                <a:spcPts val="0"/>
-              </a:spcAft>
-              <a:buNone/>
-            </a:pPr>
-            <a:r>
-              <a:rPr lang="en-US" dirty="0"/>
-              <a:t>Cleanup is the second-most-important thing about </a:t>
-            </a:r>
-            <a:r>
-              <a:rPr lang="en-US" dirty="0" err="1"/>
-              <a:t>useEffect</a:t>
-            </a:r>
-            <a:r>
-              <a:rPr lang="en-US" dirty="0"/>
-              <a:t> after the deps array, and it's the part students skip until something breaks. The mental model that sticks: the effect is a setup phase, the returned function is the matching teardown, and the pair has to balance. If the effect doesn't start anything external (e.g. it's just a fetch with no timer or subscription), no cleanup is needed. If it starts a timer / listener / socket - always cleanup. The pattern carries over to literally every real React app they'll ever touch.</a:t>
-            </a:r>
-            <a:endParaRPr dirty="0"/>
+            <a:r>
+              <a:t>Analogue to memory management. Plain fetch with no timer/subscription needs no cleanup.</a:t>
+            </a:r>
           </a:p>
         </p:txBody>
       </p:sp>
@@ -7079,132 +5537,9 @@
           </a:bodyPr>
           <a:lstStyle/>
           <a:p>
-            <a:pPr marL="0" lvl="0" indent="0" algn="l" rtl="0">
-              <a:spcBef>
-                <a:spcPts val="0"/>
-              </a:spcBef>
-              <a:spcAft>
-                <a:spcPts val="0"/>
-              </a:spcAft>
-              <a:buNone/>
-            </a:pPr>
-            <a:r>
-              <a:rPr lang="en-US" dirty="0"/>
-              <a:t>// One line different from the broken version. The interval lives</a:t>
-            </a:r>
-            <a:endParaRPr dirty="0"/>
-          </a:p>
-          <a:p>
-            <a:pPr marL="0" lvl="0" indent="0" algn="l" rtl="0">
-              <a:spcBef>
-                <a:spcPts val="0"/>
-              </a:spcBef>
-              <a:spcAft>
-                <a:spcPts val="0"/>
-              </a:spcAft>
-              <a:buNone/>
-            </a:pPr>
-            <a:r>
-              <a:rPr lang="en-US" dirty="0"/>
-              <a:t>// exactly as long as the component does - React calls the cleanup</a:t>
-            </a:r>
-            <a:endParaRPr dirty="0"/>
-          </a:p>
-          <a:p>
-            <a:pPr marL="0" lvl="0" indent="0" algn="l" rtl="0">
-              <a:spcBef>
-                <a:spcPts val="0"/>
-              </a:spcBef>
-              <a:spcAft>
-                <a:spcPts val="0"/>
-              </a:spcAft>
-              <a:buNone/>
-            </a:pPr>
-            <a:r>
-              <a:rPr lang="en-US" dirty="0"/>
-              <a:t>// when the component unmounts, and the interval is cleared. No more</a:t>
-            </a:r>
-            <a:endParaRPr dirty="0"/>
-          </a:p>
-          <a:p>
-            <a:pPr marL="0" lvl="0" indent="0" algn="l" rtl="0">
-              <a:spcBef>
-                <a:spcPts val="0"/>
-              </a:spcBef>
-              <a:spcAft>
-                <a:spcPts val="0"/>
-              </a:spcAft>
-              <a:buNone/>
-            </a:pPr>
-            <a:r>
-              <a:rPr lang="en-US" dirty="0"/>
-              <a:t>// orphan timers, no more </a:t>
-            </a:r>
-            <a:r>
-              <a:rPr lang="en-US" dirty="0" err="1"/>
-              <a:t>setState</a:t>
-            </a:r>
-            <a:r>
-              <a:rPr lang="en-US" dirty="0"/>
-              <a:t>-on-unmounted warnings.</a:t>
-            </a:r>
-            <a:endParaRPr dirty="0"/>
-          </a:p>
-          <a:p>
-            <a:pPr marL="0" lvl="0" indent="0" algn="l" rtl="0">
-              <a:spcBef>
-                <a:spcPts val="0"/>
-              </a:spcBef>
-              <a:spcAft>
-                <a:spcPts val="0"/>
-              </a:spcAft>
-              <a:buNone/>
-            </a:pPr>
-            <a:endParaRPr dirty="0"/>
-          </a:p>
-          <a:p>
-            <a:pPr marL="0" lvl="0" indent="0" algn="l" rtl="0">
-              <a:spcBef>
-                <a:spcPts val="0"/>
-              </a:spcBef>
-              <a:spcAft>
-                <a:spcPts val="0"/>
-              </a:spcAft>
-              <a:buNone/>
-            </a:pPr>
-            <a:endParaRPr dirty="0"/>
-          </a:p>
-          <a:p>
-            <a:pPr marL="0" lvl="0" indent="0" algn="l" rtl="0">
-              <a:spcBef>
-                <a:spcPts val="0"/>
-              </a:spcBef>
-              <a:spcAft>
-                <a:spcPts val="0"/>
-              </a:spcAft>
-              <a:buNone/>
-            </a:pPr>
-            <a:r>
-              <a:rPr lang="en-US" dirty="0"/>
-              <a:t>The cure is to capture the interval id and return a function that clears it, which is two added characters and a one-line return. Make the diff visible, because a leak and a clean component are separated by literally one line here. Mention briefly that this same shape (setup at the top of the effect, teardown in the return) is how you'd wire up a WebSocket (`new WebSocket` at the top, `.close()` in the return), or a window resize listener (`</a:t>
-            </a:r>
-            <a:r>
-              <a:rPr lang="en-US" dirty="0" err="1"/>
-              <a:t>addEventListener</a:t>
-            </a:r>
-            <a:r>
-              <a:rPr lang="en-US" dirty="0"/>
-              <a:t>` at the top, `</a:t>
-            </a:r>
-            <a:r>
-              <a:rPr lang="en-US" dirty="0" err="1"/>
-              <a:t>removeEventListener</a:t>
-            </a:r>
-            <a:r>
-              <a:rPr lang="en-US" dirty="0"/>
-              <a:t>` in the return). Students who hold this pattern stop having to memorize new APIs.</a:t>
-            </a:r>
-            <a:endParaRPr dirty="0"/>
+            <a:r>
+              <a:t>Show the one-line diff vs slide 35.</a:t>
+            </a:r>
           </a:p>
         </p:txBody>
       </p:sp>
@@ -7349,60 +5684,9 @@
           </a:bodyPr>
           <a:lstStyle/>
           <a:p>
-            <a:pPr marL="0" lvl="0" indent="0" algn="l" rtl="0">
-              <a:spcBef>
-                <a:spcPts val="0"/>
-              </a:spcBef>
-              <a:spcAft>
-                <a:spcPts val="0"/>
-              </a:spcAft>
-              <a:buNone/>
-            </a:pPr>
-            <a:r>
-              <a:rPr lang="en-US" dirty="0"/>
-              <a:t>The two-thing shape of </a:t>
-            </a:r>
-            <a:r>
-              <a:rPr lang="en-US" dirty="0" err="1"/>
-              <a:t>useState's</a:t>
-            </a:r>
-            <a:r>
-              <a:rPr lang="en-US" dirty="0"/>
-              <a:t> return value is the single most confusing part for students who are new to hooks. Hammer on it: you always destructure it, you always call it at the top of the component, and the names are technically up to you but the convention everybody reads is [thing, setThing].</a:t>
-            </a:r>
-            <a:r>
-              <a:rPr lang="en-US" dirty="0" err="1"/>
-              <a:t/>
-            </a:r>
-            <a:r>
-              <a:rPr lang="en-US" dirty="0"/>
-              <a:t/>
-            </a:r>
-            <a:r>
-              <a:rPr lang="en-US" dirty="0" err="1"/>
-              <a:t/>
-            </a:r>
-            <a:r>
-              <a:rPr lang="en-US" dirty="0"/>
-              <a:t> If their coding agent writes [</a:t>
-            </a:r>
-            <a:r>
-              <a:rPr lang="en-US" dirty="0" err="1"/>
-              <a:t>thingState</a:t>
-            </a:r>
-            <a:r>
-              <a:rPr lang="en-US" dirty="0"/>
-              <a:t>, </a:t>
-            </a:r>
-            <a:r>
-              <a:rPr lang="en-US" dirty="0" err="1"/>
-              <a:t>updateThing</a:t>
-            </a:r>
-            <a:r>
-              <a:rPr lang="en-US" dirty="0"/>
-              <a:t>], push it back toward the convention - readability across the ecosystem matters.</a:t>
-            </a:r>
-            <a:endParaRPr dirty="0"/>
+            <a:r>
+              <a:t>Naming convention [thing, setThing]; correct agent-written variants like [thingState, updateThing].</a:t>
+            </a:r>
           </a:p>
         </p:txBody>
       </p:sp>
@@ -7547,132 +5831,9 @@
           </a:bodyPr>
           <a:lstStyle/>
           <a:p>
-            <a:pPr marL="0" lvl="0" indent="0" algn="l" rtl="0">
-              <a:spcBef>
-                <a:spcPts val="0"/>
-              </a:spcBef>
-              <a:spcAft>
-                <a:spcPts val="0"/>
-              </a:spcAft>
-              <a:buNone/>
-            </a:pPr>
-            <a:r>
-              <a:rPr lang="en-US" dirty="0"/>
-              <a:t>// One line different from the broken version. The interval lives</a:t>
-            </a:r>
-            <a:endParaRPr dirty="0"/>
-          </a:p>
-          <a:p>
-            <a:pPr marL="0" lvl="0" indent="0" algn="l" rtl="0">
-              <a:spcBef>
-                <a:spcPts val="0"/>
-              </a:spcBef>
-              <a:spcAft>
-                <a:spcPts val="0"/>
-              </a:spcAft>
-              <a:buNone/>
-            </a:pPr>
-            <a:r>
-              <a:rPr lang="en-US" dirty="0"/>
-              <a:t>// exactly as long as the component does - React calls the cleanup</a:t>
-            </a:r>
-            <a:endParaRPr dirty="0"/>
-          </a:p>
-          <a:p>
-            <a:pPr marL="0" lvl="0" indent="0" algn="l" rtl="0">
-              <a:spcBef>
-                <a:spcPts val="0"/>
-              </a:spcBef>
-              <a:spcAft>
-                <a:spcPts val="0"/>
-              </a:spcAft>
-              <a:buNone/>
-            </a:pPr>
-            <a:r>
-              <a:rPr lang="en-US" dirty="0"/>
-              <a:t>// when the component unmounts, and the interval is cleared. No more</a:t>
-            </a:r>
-            <a:endParaRPr dirty="0"/>
-          </a:p>
-          <a:p>
-            <a:pPr marL="0" lvl="0" indent="0" algn="l" rtl="0">
-              <a:spcBef>
-                <a:spcPts val="0"/>
-              </a:spcBef>
-              <a:spcAft>
-                <a:spcPts val="0"/>
-              </a:spcAft>
-              <a:buNone/>
-            </a:pPr>
-            <a:r>
-              <a:rPr lang="en-US" dirty="0"/>
-              <a:t>// orphan timers, no more </a:t>
-            </a:r>
-            <a:r>
-              <a:rPr lang="en-US" dirty="0" err="1"/>
-              <a:t>setState</a:t>
-            </a:r>
-            <a:r>
-              <a:rPr lang="en-US" dirty="0"/>
-              <a:t>-on-unmounted warnings.</a:t>
-            </a:r>
-            <a:endParaRPr dirty="0"/>
-          </a:p>
-          <a:p>
-            <a:pPr marL="0" lvl="0" indent="0" algn="l" rtl="0">
-              <a:spcBef>
-                <a:spcPts val="0"/>
-              </a:spcBef>
-              <a:spcAft>
-                <a:spcPts val="0"/>
-              </a:spcAft>
-              <a:buNone/>
-            </a:pPr>
-            <a:endParaRPr dirty="0"/>
-          </a:p>
-          <a:p>
-            <a:pPr marL="0" lvl="0" indent="0" algn="l" rtl="0">
-              <a:spcBef>
-                <a:spcPts val="0"/>
-              </a:spcBef>
-              <a:spcAft>
-                <a:spcPts val="0"/>
-              </a:spcAft>
-              <a:buNone/>
-            </a:pPr>
-            <a:endParaRPr dirty="0"/>
-          </a:p>
-          <a:p>
-            <a:pPr marL="0" lvl="0" indent="0" algn="l" rtl="0">
-              <a:spcBef>
-                <a:spcPts val="0"/>
-              </a:spcBef>
-              <a:spcAft>
-                <a:spcPts val="0"/>
-              </a:spcAft>
-              <a:buNone/>
-            </a:pPr>
-            <a:r>
-              <a:rPr lang="en-US" dirty="0"/>
-              <a:t>The cure is to capture the interval id and return a function that clears it, which is two added characters and a one-line return. Make the diff visible, because a leak and a clean component are separated by literally one line here. Mention briefly that this same shape (setup at the top of the effect, teardown in the return) is how you'd wire up a WebSocket (`new WebSocket` at the top, `.close()` in the return), or a window resize listener (`</a:t>
-            </a:r>
-            <a:r>
-              <a:rPr lang="en-US" dirty="0" err="1"/>
-              <a:t>addEventListener</a:t>
-            </a:r>
-            <a:r>
-              <a:rPr lang="en-US" dirty="0"/>
-              <a:t>` at the top, `</a:t>
-            </a:r>
-            <a:r>
-              <a:rPr lang="en-US" dirty="0" err="1"/>
-              <a:t>removeEventListener</a:t>
-            </a:r>
-            <a:r>
-              <a:rPr lang="en-US" dirty="0"/>
-              <a:t>` in the return). Students who hold this pattern stop having to memorize new APIs.</a:t>
-            </a:r>
-            <a:endParaRPr dirty="0"/>
+            <a:r>
+              <a:t>Show the one-line diff vs slide 35.</a:t>
+            </a:r>
           </a:p>
         </p:txBody>
       </p:sp>
@@ -7817,28 +5978,9 @@
           </a:bodyPr>
           <a:lstStyle/>
           <a:p>
-            <a:pPr marL="0" lvl="0" indent="0" algn="l" rtl="0">
-              <a:spcBef>
-                <a:spcPts val="0"/>
-              </a:spcBef>
-              <a:spcAft>
-                <a:spcPts val="0"/>
-              </a:spcAft>
-              <a:buNone/>
-            </a:pPr>
-            <a:r>
-              <a:rPr lang="en-US" dirty="0"/>
-              <a:t>The honest tradeoff. Polling is the right call for the A4 frontend because it requires zero changes to their A2 API - the endpoint they already have just gets hit every couple seconds, done. SSE and </a:t>
-            </a:r>
-            <a:r>
-              <a:rPr lang="en-US" dirty="0" err="1"/>
-              <a:t>WebSockets</a:t>
-            </a:r>
-            <a:r>
-              <a:rPr lang="en-US" dirty="0"/>
-              <a:t> are the names they need to have heard so they don't think polling is the only option in the world, but I'm explicitly not teaching either today. If someone wants to do pushes for the final project that's fine, but it's a meaningful step up in server complexity and I'd push them to nail polling first. The closing line matters: polling is the right starting point and most apps ship with polling for a long time before they outgrow it.</a:t>
-            </a:r>
-            <a:endParaRPr dirty="0"/>
+            <a:r>
+              <a:t>Zero changes to their A2 API. Not teaching SSE/WebSockets; pushes allowed for final project.</a:t>
+            </a:r>
           </a:p>
         </p:txBody>
       </p:sp>
@@ -7983,28 +6125,9 @@
           </a:bodyPr>
           <a:lstStyle/>
           <a:p>
-            <a:pPr marL="0" lvl="0" indent="0" algn="l" rtl="0">
-              <a:spcBef>
-                <a:spcPts val="0"/>
-              </a:spcBef>
-              <a:spcAft>
-                <a:spcPts val="0"/>
-              </a:spcAft>
-              <a:buNone/>
-            </a:pPr>
-            <a:r>
-              <a:rPr lang="en-US" dirty="0"/>
-              <a:t>The honest tradeoff. Polling is the right call for the A4 frontend because it requires zero changes to their A2 API - the endpoint they already have just gets hit every couple seconds, done. SSE and </a:t>
-            </a:r>
-            <a:r>
-              <a:rPr lang="en-US" dirty="0" err="1"/>
-              <a:t>WebSockets</a:t>
-            </a:r>
-            <a:r>
-              <a:rPr lang="en-US" dirty="0"/>
-              <a:t> are the names they need to have heard so they don't think polling is the only option in the world, but I'm explicitly not teaching either today. If someone wants to do pushes for the final project that's fine, but it's a meaningful step up in server complexity and I'd push them to nail polling first. The closing line matters: polling is the right starting point and most apps ship with polling for a long time before they outgrow it.</a:t>
-            </a:r>
-            <a:endParaRPr dirty="0"/>
+            <a:r>
+              <a:t>Zero changes to their A2 API. Not teaching SSE/WebSockets; pushes allowed for final project.</a:t>
+            </a:r>
           </a:p>
         </p:txBody>
       </p:sp>
@@ -8148,22 +6271,7 @@
             <a:noAutofit/>
           </a:bodyPr>
           <a:lstStyle/>
-          <a:p>
-            <a:pPr marL="0" lvl="0" indent="0" algn="l" rtl="0">
-              <a:spcBef>
-                <a:spcPts val="0"/>
-              </a:spcBef>
-              <a:spcAft>
-                <a:spcPts val="0"/>
-              </a:spcAft>
-              <a:buNone/>
-            </a:pPr>
-            <a:r>
-              <a:rPr lang="en-US" dirty="0"/>
-              <a:t>Recap of the three things from the lecture, then the forward reference. 7.2 is the final project kickoff plus cloud deployment intro, so students should leave 7.1 feeling like React is basically unlocked and they can start brainstorming project ideas on the walk home.</a:t>
-            </a:r>
-            <a:endParaRPr dirty="0"/>
-          </a:p>
+          <a:p/>
         </p:txBody>
       </p:sp>
       <p:sp>
@@ -8307,136 +6415,9 @@
           </a:bodyPr>
           <a:lstStyle/>
           <a:p>
-            <a:pPr marL="0" lvl="0" indent="0" algn="l" rtl="0">
-              <a:spcBef>
-                <a:spcPts val="0"/>
-              </a:spcBef>
-              <a:spcAft>
-                <a:spcPts val="0"/>
-              </a:spcAft>
-              <a:buNone/>
-            </a:pPr>
-            <a:r>
-              <a:rPr lang="en-US" dirty="0"/>
-              <a:t>Four blanks, all from this and the previous content slide: the hook name to import (</a:t>
-            </a:r>
-            <a:r>
-              <a:rPr lang="en-US" dirty="0" err="1"/>
-              <a:t>useState</a:t>
-            </a:r>
-            <a:r>
-              <a:rPr lang="en-US" dirty="0"/>
-              <a:t>), the setter from the </a:t>
-            </a:r>
-            <a:r>
-              <a:rPr lang="en-US" dirty="0" err="1"/>
-              <a:t>destructure</a:t>
-            </a:r>
-            <a:r>
-              <a:rPr lang="en-US" dirty="0"/>
-              <a:t> (</a:t>
-            </a:r>
-            <a:r>
-              <a:rPr lang="en-US" dirty="0" err="1"/>
-              <a:t>setCount</a:t>
-            </a:r>
-            <a:r>
-              <a:rPr lang="en-US" dirty="0"/>
-              <a:t>), the hook call itself (</a:t>
-            </a:r>
-            <a:r>
-              <a:rPr lang="en-US" dirty="0" err="1"/>
-              <a:t>useState</a:t>
-            </a:r>
-            <a:r>
-              <a:rPr lang="en-US" dirty="0"/>
-              <a:t>), and the setter call in the handler (</a:t>
-            </a:r>
-            <a:r>
-              <a:rPr lang="en-US" dirty="0" err="1"/>
-              <a:t>setCount</a:t>
-            </a:r>
-            <a:r>
-              <a:rPr lang="en-US" dirty="0"/>
-              <a:t>). Give the class 30 seconds, then call on someone for each blank. The next slide is the working version with the teaching comments at the bottom - treat it as the answer key.</a:t>
-            </a:r>
-            <a:endParaRPr dirty="0"/>
-          </a:p>
-          <a:p>
-            <a:pPr marL="0" lvl="0" indent="0" algn="l" rtl="0">
-              <a:spcBef>
-                <a:spcPts val="0"/>
-              </a:spcBef>
-              <a:spcAft>
-                <a:spcPts val="0"/>
-              </a:spcAft>
-              <a:buNone/>
-            </a:pPr>
-            <a:endParaRPr dirty="0"/>
-          </a:p>
-          <a:p>
-            <a:pPr marL="0" lvl="0" indent="0" algn="l" rtl="0">
-              <a:spcBef>
-                <a:spcPts val="0"/>
-              </a:spcBef>
-              <a:spcAft>
-                <a:spcPts val="0"/>
-              </a:spcAft>
-              <a:buNone/>
-            </a:pPr>
-            <a:r>
-              <a:rPr lang="en-US" dirty="0"/>
-              <a:t>const [count, </a:t>
-            </a:r>
-            <a:r>
-              <a:rPr lang="en-US" dirty="0" err="1"/>
-              <a:t>setCount</a:t>
-            </a:r>
-            <a:r>
-              <a:rPr lang="en-US" dirty="0"/>
-              <a:t>] = </a:t>
-            </a:r>
-            <a:r>
-              <a:rPr lang="en-US" dirty="0" err="1"/>
-              <a:t>useState</a:t>
-            </a:r>
-            <a:r>
-              <a:rPr lang="en-US" dirty="0"/>
-              <a:t>(0);</a:t>
-            </a:r>
-            <a:endParaRPr dirty="0"/>
-          </a:p>
-          <a:p>
-            <a:pPr marL="0" lvl="0" indent="0" algn="l" rtl="0">
-              <a:spcBef>
-                <a:spcPts val="0"/>
-              </a:spcBef>
-              <a:spcAft>
-                <a:spcPts val="0"/>
-              </a:spcAft>
-              <a:buNone/>
-            </a:pPr>
-            <a:r>
-              <a:rPr lang="en-US" dirty="0"/>
-              <a:t>&lt;button </a:t>
-            </a:r>
-            <a:r>
-              <a:rPr lang="en-US" dirty="0" err="1"/>
-              <a:t>onClick</a:t>
-            </a:r>
-            <a:r>
-              <a:rPr lang="en-US" dirty="0"/>
-              <a:t>={() =&gt; </a:t>
-            </a:r>
-            <a:r>
-              <a:rPr lang="en-US" dirty="0" err="1"/>
-              <a:t>setCount</a:t>
-            </a:r>
-            <a:r>
-              <a:rPr lang="en-US" dirty="0"/>
-              <a:t>(count + 1)}&gt;+&lt;/button&gt;</a:t>
-            </a:r>
-            <a:endParaRPr dirty="0"/>
+            <a:r>
+              <a:t>30 seconds, then call on someone per blank. Answers: useState, setCount, useState, setCount.</a:t>
+            </a:r>
           </a:p>
         </p:txBody>
       </p:sp>
@@ -8581,52 +6562,9 @@
           </a:bodyPr>
           <a:lstStyle/>
           <a:p>
-            <a:pPr marL="0" lvl="0" indent="0" algn="l" rtl="0">
-              <a:spcBef>
-                <a:spcPts val="0"/>
-              </a:spcBef>
-              <a:spcAft>
-                <a:spcPts val="0"/>
-              </a:spcAft>
-              <a:buNone/>
-            </a:pPr>
-            <a:r>
-              <a:rPr lang="en-US" dirty="0"/>
-              <a:t>The working version is literally three lines different from the broken one - import </a:t>
-            </a:r>
-            <a:r>
-              <a:rPr lang="en-US" dirty="0" err="1"/>
-              <a:t>useState</a:t>
-            </a:r>
-            <a:r>
-              <a:rPr lang="en-US" dirty="0"/>
-              <a:t>, declare with [count, </a:t>
-            </a:r>
-            <a:r>
-              <a:rPr lang="en-US" dirty="0" err="1"/>
-              <a:t>setCount</a:t>
-            </a:r>
-            <a:r>
-              <a:rPr lang="en-US" dirty="0"/>
-              <a:t>] = </a:t>
-            </a:r>
-            <a:r>
-              <a:rPr lang="en-US" dirty="0" err="1"/>
-              <a:t>useState</a:t>
-            </a:r>
-            <a:r>
-              <a:rPr lang="en-US" dirty="0"/>
-              <a:t>(0), and call </a:t>
-            </a:r>
-            <a:r>
-              <a:rPr lang="en-US" dirty="0" err="1"/>
-              <a:t>setCount</a:t>
-            </a:r>
-            <a:r>
-              <a:rPr lang="en-US" dirty="0"/>
-              <a:t> in the handler. The UI actually updates because calling the setter is the signal to React that state changed and a re-render is needed. Make the diff visible, don't just let students read the new version.</a:t>
-            </a:r>
-            <a:endParaRPr dirty="0"/>
+            <a:r>
+              <a:t>Show the three-line diff against the broken counter on slide 1.</a:t>
+            </a:r>
           </a:p>
         </p:txBody>
       </p:sp>
@@ -8771,64 +6709,9 @@
           </a:bodyPr>
           <a:lstStyle/>
           <a:p>
-            <a:pPr marL="0" lvl="0" indent="0" algn="l" rtl="0">
-              <a:spcBef>
-                <a:spcPts val="0"/>
-              </a:spcBef>
-              <a:spcAft>
-                <a:spcPts val="0"/>
-              </a:spcAft>
-              <a:buNone/>
-            </a:pPr>
-            <a:r>
-              <a:rPr lang="en-US" dirty="0"/>
-              <a:t>Any closure (like an </a:t>
-            </a:r>
-            <a:r>
-              <a:rPr lang="en-US" dirty="0" err="1"/>
-              <a:t>onClick</a:t>
-            </a:r>
-            <a:r>
-              <a:rPr lang="en-US" dirty="0"/>
-              <a:t>) that captures count captures that render's value, even if state changes later.</a:t>
-            </a:r>
-            <a:endParaRPr dirty="0"/>
-          </a:p>
-          <a:p>
-            <a:pPr marL="0" lvl="0" indent="0" algn="l" rtl="0">
-              <a:spcBef>
-                <a:spcPts val="0"/>
-              </a:spcBef>
-              <a:spcAft>
-                <a:spcPts val="0"/>
-              </a:spcAft>
-              <a:buNone/>
-            </a:pPr>
-            <a:endParaRPr dirty="0"/>
-          </a:p>
-          <a:p>
-            <a:pPr marL="0" lvl="0" indent="0" algn="l" rtl="0">
-              <a:spcBef>
-                <a:spcPts val="0"/>
-              </a:spcBef>
-              <a:spcAft>
-                <a:spcPts val="0"/>
-              </a:spcAft>
-              <a:buNone/>
-            </a:pPr>
-            <a:r>
-              <a:rPr lang="en-US" dirty="0"/>
-              <a:t>The 'React keeps it in its own memory' mental model is really what unlocks the intuition for hooks. Students who believe count is 'just a variable' get confused by closure bugs for weeks...students who believe React is storing it somewhere else understand that the function is just asking React for the current value every run. That framing does a lot of work later when we hit </a:t>
-            </a:r>
-            <a:r>
-              <a:rPr lang="en-US" dirty="0" err="1"/>
-              <a:t>useEffect</a:t>
-            </a:r>
-            <a:r>
-              <a:rPr lang="en-US" dirty="0"/>
-              <a:t>.</a:t>
-            </a:r>
-            <a:endParaRPr dirty="0"/>
+            <a:r>
+              <a:t>Closures like onClick capture that render's count; sets up the next quiz.</a:t>
+            </a:r>
           </a:p>
         </p:txBody>
       </p:sp>
@@ -8973,60 +6856,9 @@
           </a:bodyPr>
           <a:lstStyle/>
           <a:p>
-            <a:pPr marL="0" lvl="0" indent="0" algn="l" rtl="0">
-              <a:spcBef>
-                <a:spcPts val="0"/>
-              </a:spcBef>
-              <a:spcAft>
-                <a:spcPts val="0"/>
-              </a:spcAft>
-              <a:buNone/>
-            </a:pPr>
-            <a:r>
-              <a:rPr lang="en-US" dirty="0"/>
-              <a:t>Answer: 1. Pause for guesses first - this one tricks even students who got the previous slide. The bug is the snapshot framing playing out: `count` was 0 when this render captured it, so both </a:t>
-            </a:r>
-            <a:r>
-              <a:rPr lang="en-US" dirty="0" err="1"/>
-              <a:t>setCount</a:t>
-            </a:r>
-            <a:r>
-              <a:rPr lang="en-US" dirty="0"/>
-              <a:t>(count + 1) calls are </a:t>
-            </a:r>
-            <a:r>
-              <a:rPr lang="en-US" dirty="0" err="1"/>
-              <a:t>setCount</a:t>
-            </a:r>
-            <a:r>
-              <a:rPr lang="en-US" dirty="0"/>
-              <a:t>(0 + 1) = </a:t>
-            </a:r>
-            <a:r>
-              <a:rPr lang="en-US" dirty="0" err="1"/>
-              <a:t>setCount</a:t>
-            </a:r>
-            <a:r>
-              <a:rPr lang="en-US" dirty="0"/>
-              <a:t>(1). Two writes of the same value, React stores 1. The cure is the FUNCTIONAL updater form: </a:t>
-            </a:r>
-            <a:r>
-              <a:rPr lang="en-US" dirty="0" err="1"/>
-              <a:t>setCount</a:t>
-            </a:r>
-            <a:r>
-              <a:rPr lang="en-US" dirty="0"/>
-              <a:t>(c =&gt; c + 1). When you pass a function, React calls it with the latest queued value, so the second call gets c=1 and returns 2. Mention this verbally - not needed for the rest of the lecture, but students who go work at a real company will see </a:t>
-            </a:r>
-            <a:r>
-              <a:rPr lang="en-US" dirty="0" err="1"/>
-              <a:t>setCount</a:t>
-            </a:r>
-            <a:r>
-              <a:rPr lang="en-US" dirty="0"/>
-              <a:t>(c =&gt; c + 1) everywhere and should know what it's for.</a:t>
-            </a:r>
-            <a:endParaRPr dirty="0"/>
+            <a:r>
+              <a:t>Guesses first. Answer: 1, both calls see count=0. Fix: setCount(c =&gt; c + 1).</a:t>
+            </a:r>
           </a:p>
         </p:txBody>
       </p:sp>
@@ -9171,60 +7003,9 @@
           </a:bodyPr>
           <a:lstStyle/>
           <a:p>
-            <a:pPr marL="0" lvl="0" indent="0" algn="l" rtl="0">
-              <a:spcBef>
-                <a:spcPts val="0"/>
-              </a:spcBef>
-              <a:spcAft>
-                <a:spcPts val="0"/>
-              </a:spcAft>
-              <a:buNone/>
-            </a:pPr>
-            <a:r>
-              <a:rPr lang="en-US" dirty="0"/>
-              <a:t>This slide is really the under-explained mechanic of React, and once students get it the rules of hooks stop feeling arbitrary. Walk through it slowly: before React calls Counter(), it sets a module-level 'currently rendering fiber' pointer. </a:t>
-            </a:r>
-            <a:r>
-              <a:rPr lang="en-US" dirty="0" err="1"/>
-              <a:t>useState</a:t>
-            </a:r>
-            <a:r>
-              <a:rPr lang="en-US" dirty="0"/>
-              <a:t> reads that pointer, walks the linked list of hook slots on that fiber, grabs (or creates) the next slot by call order, and returns [</a:t>
-            </a:r>
-            <a:r>
-              <a:rPr lang="en-US" dirty="0" err="1"/>
-              <a:t>slot.value</a:t>
-            </a:r>
-            <a:r>
-              <a:rPr lang="en-US" dirty="0"/>
-              <a:t>, </a:t>
-            </a:r>
-            <a:r>
-              <a:rPr lang="en-US" dirty="0" err="1"/>
-              <a:t>slot.setter</a:t>
-            </a:r>
-            <a:r>
-              <a:rPr lang="en-US" dirty="0"/>
-              <a:t>]. The setter was created when the slot was, capturing (fiber, </a:t>
-            </a:r>
-            <a:r>
-              <a:rPr lang="en-US" dirty="0" err="1"/>
-              <a:t>slotIndex</a:t>
-            </a:r>
-            <a:r>
-              <a:rPr lang="en-US" dirty="0"/>
-              <a:t>) in its closure...so calling it later already has all the addressing info baked in. Pay this off later in 7.x or 8.x when stale closures or rules-of-hooks lint errors come up. The rules-of-hooks bit at the bottom matters - students who skip the rule and conditionally call </a:t>
-            </a:r>
-            <a:r>
-              <a:rPr lang="en-US" dirty="0" err="1"/>
-              <a:t>useState</a:t>
-            </a:r>
-            <a:r>
-              <a:rPr lang="en-US" dirty="0"/>
-              <a:t> get totally cryptic bugs that are basically uninvestigable without this mental model.</a:t>
-            </a:r>
-            <a:endParaRPr dirty="0"/>
+            <a:r>
+              <a:t>Walk through: React sets a 'currently rendering fiber' pointer before calling Counter().</a:t>
+            </a:r>
           </a:p>
         </p:txBody>
       </p:sp>

--- a/lectures/Lecture 7.1 - React State and Effects.pptx
+++ b/lectures/Lecture 7.1 - React State and Effects.pptx
@@ -1604,6 +1604,17 @@
               <a:t>Answers: setName, useState(""), setName(e.target.value). Forget onChange and typing does nothing.</a:t>
             </a:r>
           </a:p>
+          <a:p/>
+          <a:p>
+            <a:r>
+              <a:t>const [name, setName] = useState("");</a:t>
+            </a:r>
+          </a:p>
+          <a:p>
+            <a:r>
+              <a:t>setName(e.target.value)</a:t>
+            </a:r>
+          </a:p>
         </p:txBody>
       </p:sp>
       <p:sp>
@@ -4369,6 +4380,71 @@
           </a:bodyPr>
           <a:lstStyle/>
           <a:p/>
+          <a:p>
+            <a:r>
+              <a:t>   const [messages, setMessages] = useState&lt;Message[]&gt;([]);</a:t>
+            </a:r>
+          </a:p>
+          <a:p>
+            <a:r>
+              <a:t>    const [loading,  setLoading]  = useState(true);</a:t>
+            </a:r>
+          </a:p>
+          <a:p>
+            <a:r>
+              <a:t>    const [error,    setError]    = useState&lt;string | null&gt;(null);</a:t>
+            </a:r>
+          </a:p>
+          <a:p>
+            <a:r>
+              <a:t>if (!r.ok)</a:t>
+            </a:r>
+          </a:p>
+          <a:p>
+            <a:r>
+              <a:t> setMessages(await r.json());</a:t>
+            </a:r>
+          </a:p>
+          <a:p>
+            <a:r>
+              <a:t>setLoading(false);</a:t>
+            </a:r>
+          </a:p>
+          <a:p>
+            <a:r>
+              <a:t>useEffect</a:t>
+            </a:r>
+          </a:p>
+          <a:p>
+            <a:r>
+              <a:t>    }, []);</a:t>
+            </a:r>
+          </a:p>
+          <a:p>
+            <a:r>
+              <a:t>    if (loading) return &lt;p&gt;Loading...&lt;/p&gt;;</a:t>
+            </a:r>
+          </a:p>
+          <a:p>
+            <a:r>
+              <a:t>    if (error)   return &lt;p&gt;Failed: {error}&lt;/p&gt;;</a:t>
+            </a:r>
+          </a:p>
+          <a:p>
+            <a:r>
+              <a:t>    return &lt;ul&gt;{messages.map(m =&gt; (</a:t>
+            </a:r>
+          </a:p>
+          <a:p>
+            <a:r>
+              <a:t>        &lt;li key={m.id}&gt;&lt;b&gt;{m.author}:&lt;/b&gt; {m.text}&lt;/li&gt;</a:t>
+            </a:r>
+          </a:p>
+          <a:p>
+            <a:r>
+              <a:t>    ))}&lt;/ul&gt;;</a:t>
+            </a:r>
+          </a:p>
         </p:txBody>
       </p:sp>
       <p:sp>
@@ -6417,6 +6493,17 @@
           <a:p>
             <a:r>
               <a:t>30 seconds, then call on someone per blank. Answers: useState, setCount, useState, setCount.</a:t>
+            </a:r>
+          </a:p>
+          <a:p/>
+          <a:p>
+            <a:r>
+              <a:t>const [count, setCount] = useState(0);</a:t>
+            </a:r>
+          </a:p>
+          <a:p>
+            <a:r>
+              <a:t>&lt;button onClick={() =&gt; setCount(count + 1)}&gt;+&lt;/button&gt;</a:t>
             </a:r>
           </a:p>
         </p:txBody>
